--- a/slides_prog_concorrente.pptx
+++ b/slides_prog_concorrente.pptx
@@ -4,6 +4,9 @@
   <p:sldMasterIdLst>
     <p:sldMasterId id="2147483648" r:id="rId1"/>
   </p:sldMasterIdLst>
+  <p:notesMasterIdLst>
+    <p:notesMasterId r:id="rId8"/>
+  </p:notesMasterIdLst>
   <p:sldIdLst>
     <p:sldId id="256" r:id="rId2"/>
     <p:sldId id="257" r:id="rId3"/>
@@ -12,10 +15,7 @@
     <p:sldId id="260" r:id="rId6"/>
     <p:sldId id="261" r:id="rId7"/>
   </p:sldIdLst>
-  <p:notesMasterIdLst>
-    <p:notesMasterId r:id="rId8"/>
-  </p:notesMasterIdLst>
-  <p:sldSz cx="9144000" cy="5143500"/>
+  <p:sldSz cx="9144000" cy="5143500" type="screen16x9"/>
   <p:notesSz cx="5143500" cy="9144000"/>
   <p:defaultTextStyle>
     <a:lvl1pPr marL="0" algn="l" defTabSz="914400" rtl="0" eaLnBrk="1" latinLnBrk="0" hangingPunct="1">
@@ -109,13 +109,20 @@
       </a:defRPr>
     </a:lvl9pPr>
   </p:defaultTextStyle>
+  <p:extLst>
+    <p:ext uri="{EFAFB233-063F-42B5-8137-9DF3F51BA10A}">
+      <p15:sldGuideLst xmlns:p15="http://schemas.microsoft.com/office/powerpoint/2012/main"/>
+    </p:ext>
+  </p:extLst>
 </p:presentation>
 </file>
 
 <file path=ppt/charts/chart1.xml><?xml version="1.0" encoding="utf-8"?>
-<c:chartSpace xmlns:c="http://schemas.openxmlformats.org/drawingml/2006/chart" xmlns:a="http://schemas.openxmlformats.org/drawingml/2006/main" xmlns:r="http://schemas.openxmlformats.org/officeDocument/2006/relationships">
+<c:chartSpace xmlns:c="http://schemas.openxmlformats.org/drawingml/2006/chart" xmlns:a="http://schemas.openxmlformats.org/drawingml/2006/main" xmlns:r="http://schemas.openxmlformats.org/officeDocument/2006/relationships" xmlns:c16r2="http://schemas.microsoft.com/office/drawing/2015/06/chart">
   <c:date1904 val="0"/>
+  <c:lang val="pt-BR"/>
   <c:roundedCorners val="1"/>
+  <c:style val="2"/>
   <c:chart>
     <c:title>
       <c:tx>
@@ -132,7 +139,7 @@
               </a:defRPr>
             </a:pPr>
             <a:r>
-              <a:rPr sz="1100" b="0" i="0" u="none" strike="noStrike">
+              <a:rPr lang="pt-BR" sz="1100" b="0" i="0" u="none" strike="noStrike">
                 <a:solidFill>
                   <a:srgbClr val="0D1B2A"/>
                 </a:solidFill>
@@ -143,7 +150,6 @@
           </a:p>
         </c:rich>
       </c:tx>
-      <c:layout/>
       <c:overlay val="0"/>
     </c:title>
     <c:autoTitleDeleted val="0"/>
@@ -174,30 +180,6 @@
             <a:effectLst/>
           </c:spPr>
           <c:invertIfNegative val="0"/>
-          <c:dLbls>
-            <c:numFmt formatCode="#,##0" sourceLinked="0"/>
-            <c:txPr>
-              <a:bodyPr/>
-              <a:lstStyle/>
-              <a:p>
-                <a:pPr>
-                  <a:defRPr b="0" i="0" strike="noStrike" sz="1000" u="none">
-                    <a:solidFill>
-                      <a:srgbClr val="1E293B"/>
-                    </a:solidFill>
-                    <a:latin typeface="Arial"/>
-                  </a:defRPr>
-                </a:pPr>
-              </a:p>
-            </c:txPr>
-            <c:showLegendKey val="0"/>
-            <c:showVal val="1"/>
-            <c:showCatName val="0"/>
-            <c:showSerName val="0"/>
-            <c:showPercent val="0"/>
-            <c:showBubbleSize val="0"/>
-            <c:showLeaderLines val="0"/>
-          </c:dLbls>
           <c:dPt>
             <c:idx val="0"/>
             <c:invertIfNegative val="0"/>
@@ -208,6 +190,11 @@
               </a:solidFill>
               <a:effectLst/>
             </c:spPr>
+            <c:extLst>
+              <c:ext xmlns:c16="http://schemas.microsoft.com/office/drawing/2014/chart" uri="{C3380CC4-5D6E-409C-BE32-E72D297353CC}">
+                <c16:uniqueId val="{00000001-E814-42A8-AFE0-F708DDEFD9F7}"/>
+              </c:ext>
+            </c:extLst>
           </c:dPt>
           <c:dPt>
             <c:idx val="1"/>
@@ -219,6 +206,11 @@
               </a:solidFill>
               <a:effectLst/>
             </c:spPr>
+            <c:extLst>
+              <c:ext xmlns:c16="http://schemas.microsoft.com/office/drawing/2014/chart" uri="{C3380CC4-5D6E-409C-BE32-E72D297353CC}">
+                <c16:uniqueId val="{00000003-E814-42A8-AFE0-F708DDEFD9F7}"/>
+              </c:ext>
+            </c:extLst>
           </c:dPt>
           <c:dPt>
             <c:idx val="2"/>
@@ -230,6 +222,11 @@
               </a:solidFill>
               <a:effectLst/>
             </c:spPr>
+            <c:extLst>
+              <c:ext xmlns:c16="http://schemas.microsoft.com/office/drawing/2014/chart" uri="{C3380CC4-5D6E-409C-BE32-E72D297353CC}">
+                <c16:uniqueId val="{00000005-E814-42A8-AFE0-F708DDEFD9F7}"/>
+              </c:ext>
+            </c:extLst>
           </c:dPt>
           <c:dPt>
             <c:idx val="3"/>
@@ -241,6 +238,11 @@
               </a:solidFill>
               <a:effectLst/>
             </c:spPr>
+            <c:extLst>
+              <c:ext xmlns:c16="http://schemas.microsoft.com/office/drawing/2014/chart" uri="{C3380CC4-5D6E-409C-BE32-E72D297353CC}">
+                <c16:uniqueId val="{00000007-E814-42A8-AFE0-F708DDEFD9F7}"/>
+              </c:ext>
+            </c:extLst>
           </c:dPt>
           <c:dPt>
             <c:idx val="4"/>
@@ -252,31 +254,71 @@
               </a:solidFill>
               <a:effectLst/>
             </c:spPr>
+            <c:extLst>
+              <c:ext xmlns:c16="http://schemas.microsoft.com/office/drawing/2014/chart" uri="{C3380CC4-5D6E-409C-BE32-E72D297353CC}">
+                <c16:uniqueId val="{00000009-E814-42A8-AFE0-F708DDEFD9F7}"/>
+              </c:ext>
+            </c:extLst>
           </c:dPt>
+          <c:dLbls>
+            <c:numFmt formatCode="#,##0" sourceLinked="0"/>
+            <c:spPr>
+              <a:noFill/>
+              <a:ln>
+                <a:noFill/>
+              </a:ln>
+              <a:effectLst/>
+            </c:spPr>
+            <c:txPr>
+              <a:bodyPr/>
+              <a:lstStyle/>
+              <a:p>
+                <a:pPr>
+                  <a:defRPr sz="1000" b="0" i="0" u="none" strike="noStrike">
+                    <a:solidFill>
+                      <a:srgbClr val="1E293B"/>
+                    </a:solidFill>
+                    <a:latin typeface="Arial"/>
+                  </a:defRPr>
+                </a:pPr>
+                <a:endParaRPr lang="pt-BR"/>
+              </a:p>
+            </c:txPr>
+            <c:showLegendKey val="0"/>
+            <c:showVal val="1"/>
+            <c:showCatName val="0"/>
+            <c:showSerName val="0"/>
+            <c:showPercent val="0"/>
+            <c:showBubbleSize val="0"/>
+            <c:showLeaderLines val="0"/>
+            <c:extLst>
+              <c:ext xmlns:c15="http://schemas.microsoft.com/office/drawing/2012/chart" uri="{CE6537A1-D6FC-4f65-9D91-7224C49458BB}">
+                <c15:showLeaderLines val="0"/>
+              </c:ext>
+            </c:extLst>
+          </c:dLbls>
           <c:cat>
-            <c:multiLvlStrRef>
+            <c:strRef>
               <c:f>Sheet1!$A$2:$A$6</c:f>
-              <c:multiLvlStrCache>
+              <c:strCache>
                 <c:ptCount val="5"/>
-                <c:lvl>
-                  <c:pt idx="0">
-                    <c:v>Serial</c:v>
-                  </c:pt>
-                  <c:pt idx="1">
-                    <c:v>2 Workers</c:v>
-                  </c:pt>
-                  <c:pt idx="2">
-                    <c:v>4 Workers</c:v>
-                  </c:pt>
-                  <c:pt idx="3">
-                    <c:v>8 Workers</c:v>
-                  </c:pt>
-                  <c:pt idx="4">
-                    <c:v>12 Workers</c:v>
-                  </c:pt>
-                </c:lvl>
-              </c:multiLvlStrCache>
-            </c:multiLvlStrRef>
+                <c:pt idx="0">
+                  <c:v>Serial</c:v>
+                </c:pt>
+                <c:pt idx="1">
+                  <c:v>2 Workers</c:v>
+                </c:pt>
+                <c:pt idx="2">
+                  <c:v>4 Workers</c:v>
+                </c:pt>
+                <c:pt idx="3">
+                  <c:v>8 Workers</c:v>
+                </c:pt>
+                <c:pt idx="4">
+                  <c:v>12 Workers</c:v>
+                </c:pt>
+              </c:strCache>
+            </c:strRef>
           </c:cat>
           <c:val>
             <c:numRef>
@@ -294,7 +336,7 @@
                   <c:v>3.12</c:v>
                 </c:pt>
                 <c:pt idx="3">
-                  <c:v>4.73</c:v>
+                  <c:v>4.7300000000000004</c:v>
                 </c:pt>
                 <c:pt idx="4">
                   <c:v>5.63</c:v>
@@ -302,36 +344,23 @@
               </c:numCache>
             </c:numRef>
           </c:val>
+          <c:extLst>
+            <c:ext xmlns:c16="http://schemas.microsoft.com/office/drawing/2014/chart" uri="{C3380CC4-5D6E-409C-BE32-E72D297353CC}">
+              <c16:uniqueId val="{0000000A-E814-42A8-AFE0-F708DDEFD9F7}"/>
+            </c:ext>
+          </c:extLst>
         </c:ser>
         <c:dLbls>
-          <c:numFmt formatCode="#,##0" sourceLinked="0"/>
-          <c:txPr>
-            <a:bodyPr/>
-            <a:lstStyle/>
-            <a:p>
-              <a:pPr>
-                <a:defRPr b="0" i="0" strike="noStrike" sz="1000" u="none">
-                  <a:solidFill>
-                    <a:srgbClr val="1E293B"/>
-                  </a:solidFill>
-                  <a:latin typeface="Arial"/>
-                </a:defRPr>
-              </a:pPr>
-            </a:p>
-          </c:txPr>
           <c:showLegendKey val="0"/>
           <c:showVal val="1"/>
           <c:showCatName val="0"/>
           <c:showSerName val="0"/>
           <c:showPercent val="0"/>
           <c:showBubbleSize val="0"/>
-          <c:showLeaderLines val="0"/>
         </c:dLbls>
         <c:gapWidth val="150"/>
-        <c:overlap val="0"/>
         <c:axId val="2094734554"/>
         <c:axId val="2094734552"/>
-        <c:axId val="2094734556"/>
       </c:barChart>
       <c:catAx>
         <c:axId val="2094734554"/>
@@ -365,13 +394,14 @@
                 <a:latin typeface="Arial"/>
               </a:defRPr>
             </a:pPr>
-            <a:endParaRPr lang="en-US"/>
+            <a:endParaRPr lang="pt-BR"/>
           </a:p>
         </c:txPr>
         <c:crossAx val="2094734552"/>
         <c:crosses val="autoZero"/>
         <c:auto val="1"/>
         <c:lblAlgn val="ctr"/>
+        <c:lblOffset val="100"/>
         <c:noMultiLvlLbl val="1"/>
       </c:catAx>
       <c:valAx>
@@ -417,7 +447,7 @@
                 <a:latin typeface="Arial"/>
               </a:defRPr>
             </a:pPr>
-            <a:endParaRPr lang="en-US"/>
+            <a:endParaRPr lang="pt-BR"/>
           </a:p>
         </c:txPr>
         <c:crossAx val="2094734554"/>
@@ -434,6 +464,7 @@
     </c:plotArea>
     <c:plotVisOnly val="1"/>
     <c:dispBlanksAs val="span"/>
+    <c:showDLblsOverMax val="1"/>
   </c:chart>
   <c:spPr>
     <a:solidFill>
@@ -472,234 +503,10 @@
           <a:chExt cx="0" cy="0"/>
         </a:xfrm>
       </p:grpSpPr>
-      <p:sp>
-        <p:nvSpPr>
-          <p:cNvPr id="2" name="Header Placeholder 1"/>
-          <p:cNvSpPr>
-            <a:spLocks noGrp="1"/>
-          </p:cNvSpPr>
-          <p:nvPr>
-            <p:ph type="hdr" sz="quarter"/>
-          </p:nvPr>
-        </p:nvSpPr>
-        <p:spPr>
-          <a:xfrm>
-            <a:off x="0" y="0"/>
-            <a:ext cx="2971800" cy="458788"/>
-          </a:xfrm>
-          <a:prstGeom prst="rect">
-            <a:avLst/>
-          </a:prstGeom>
-        </p:spPr>
-        <p:txBody>
-          <a:bodyPr vert="horz" lIns="91440" tIns="45720" rIns="91440" bIns="45720" rtlCol="0"/>
-          <a:lstStyle>
-            <a:lvl1pPr algn="l">
-              <a:defRPr sz="1200"/>
-            </a:lvl1pPr>
-          </a:lstStyle>
-          <a:p>
-            <a:endParaRPr lang="en-US"/>
-          </a:p>
-        </p:txBody>
-      </p:sp>
-      <p:sp>
-        <p:nvSpPr>
-          <p:cNvPr id="3" name="Date Placeholder 2"/>
-          <p:cNvSpPr>
-            <a:spLocks noGrp="1"/>
-          </p:cNvSpPr>
-          <p:nvPr>
-            <p:ph type="dt" idx="1"/>
-          </p:nvPr>
-        </p:nvSpPr>
-        <p:spPr>
-          <a:xfrm>
-            <a:off x="3884613" y="0"/>
-            <a:ext cx="2971800" cy="458788"/>
-          </a:xfrm>
-          <a:prstGeom prst="rect">
-            <a:avLst/>
-          </a:prstGeom>
-        </p:spPr>
-        <p:txBody>
-          <a:bodyPr vert="horz" lIns="91440" tIns="45720" rIns="91440" bIns="45720" rtlCol="0"/>
-          <a:lstStyle>
-            <a:lvl1pPr algn="r">
-              <a:defRPr sz="1200"/>
-            </a:lvl1pPr>
-          </a:lstStyle>
-          <a:p>
-            <a:fld id="{5282F153-3F37-0F45-9E97-73ACFA13230C}" type="datetimeFigureOut">
-              <a:rPr lang="en-US"/>
-              <a:t>7/23/19</a:t>
-            </a:fld>
-            <a:endParaRPr lang="en-US"/>
-          </a:p>
-        </p:txBody>
-      </p:sp>
-      <p:sp>
-        <p:nvSpPr>
-          <p:cNvPr id="4" name="Slide Image Placeholder 3"/>
-          <p:cNvSpPr>
-            <a:spLocks noGrp="1" noRot="1" noChangeAspect="1"/>
-          </p:cNvSpPr>
-          <p:nvPr>
-            <p:ph type="sldImg" idx="2"/>
-          </p:nvPr>
-        </p:nvSpPr>
-        <p:spPr>
-          <a:xfrm>
-            <a:off x="685800" y="1143000"/>
-            <a:ext cx="5486400" cy="3086100"/>
-          </a:xfrm>
-          <a:prstGeom prst="rect">
-            <a:avLst/>
-          </a:prstGeom>
-          <a:noFill/>
-          <a:ln w="12700">
-            <a:solidFill>
-              <a:prstClr val="black"/>
-            </a:solidFill>
-          </a:ln>
-        </p:spPr>
-        <p:txBody>
-          <a:bodyPr vert="horz" lIns="91440" tIns="45720" rIns="91440" bIns="45720" rtlCol="0" anchor="ctr"/>
-          <a:lstStyle/>
-          <a:p>
-            <a:endParaRPr lang="en-US"/>
-          </a:p>
-        </p:txBody>
-      </p:sp>
-      <p:sp>
-        <p:nvSpPr>
-          <p:cNvPr id="5" name="Notes Placeholder 4"/>
-          <p:cNvSpPr>
-            <a:spLocks noGrp="1"/>
-          </p:cNvSpPr>
-          <p:nvPr>
-            <p:ph type="body" sz="quarter" idx="3"/>
-          </p:nvPr>
-        </p:nvSpPr>
-        <p:spPr>
-          <a:xfrm>
-            <a:off x="685800" y="4400550"/>
-            <a:ext cx="5486400" cy="3600450"/>
-          </a:xfrm>
-          <a:prstGeom prst="rect">
-            <a:avLst/>
-          </a:prstGeom>
-        </p:spPr>
-        <p:txBody>
-          <a:bodyPr vert="horz" lIns="91440" tIns="45720" rIns="91440" bIns="45720" rtlCol="0"/>
-          <a:lstStyle/>
-          <a:p>
-            <a:pPr lvl="0"/>
-            <a:r>
-              <a:rPr lang="en-US"/>
-              <a:t>Click to edit Master text styles</a:t>
-            </a:r>
-          </a:p>
-          <a:p>
-            <a:pPr lvl="1"/>
-            <a:r>
-              <a:rPr lang="en-US"/>
-              <a:t>Second level</a:t>
-            </a:r>
-          </a:p>
-          <a:p>
-            <a:pPr lvl="2"/>
-            <a:r>
-              <a:rPr lang="en-US"/>
-              <a:t>Third level</a:t>
-            </a:r>
-          </a:p>
-          <a:p>
-            <a:pPr lvl="3"/>
-            <a:r>
-              <a:rPr lang="en-US"/>
-              <a:t>Fourth level</a:t>
-            </a:r>
-          </a:p>
-          <a:p>
-            <a:pPr lvl="4"/>
-            <a:r>
-              <a:rPr lang="en-US"/>
-              <a:t>Fifth level</a:t>
-            </a:r>
-          </a:p>
-        </p:txBody>
-      </p:sp>
-      <p:sp>
-        <p:nvSpPr>
-          <p:cNvPr id="6" name="Footer Placeholder 5"/>
-          <p:cNvSpPr>
-            <a:spLocks noGrp="1"/>
-          </p:cNvSpPr>
-          <p:nvPr>
-            <p:ph type="ftr" sz="quarter" idx="4"/>
-          </p:nvPr>
-        </p:nvSpPr>
-        <p:spPr>
-          <a:xfrm>
-            <a:off x="0" y="8685213"/>
-            <a:ext cx="2971800" cy="458787"/>
-          </a:xfrm>
-          <a:prstGeom prst="rect">
-            <a:avLst/>
-          </a:prstGeom>
-        </p:spPr>
-        <p:txBody>
-          <a:bodyPr vert="horz" lIns="91440" tIns="45720" rIns="91440" bIns="45720" rtlCol="0" anchor="b"/>
-          <a:lstStyle>
-            <a:lvl1pPr algn="l">
-              <a:defRPr sz="1200"/>
-            </a:lvl1pPr>
-          </a:lstStyle>
-          <a:p>
-            <a:endParaRPr lang="en-US"/>
-          </a:p>
-        </p:txBody>
-      </p:sp>
-      <p:sp>
-        <p:nvSpPr>
-          <p:cNvPr id="7" name="Slide Number Placeholder 6"/>
-          <p:cNvSpPr>
-            <a:spLocks noGrp="1"/>
-          </p:cNvSpPr>
-          <p:nvPr>
-            <p:ph type="sldNum" sz="quarter" idx="5"/>
-          </p:nvPr>
-        </p:nvSpPr>
-        <p:spPr>
-          <a:xfrm>
-            <a:off x="3884613" y="8685213"/>
-            <a:ext cx="2971800" cy="458787"/>
-          </a:xfrm>
-          <a:prstGeom prst="rect">
-            <a:avLst/>
-          </a:prstGeom>
-        </p:spPr>
-        <p:txBody>
-          <a:bodyPr vert="horz" lIns="91440" tIns="45720" rIns="91440" bIns="45720" rtlCol="0" anchor="b"/>
-          <a:lstStyle>
-            <a:lvl1pPr algn="r">
-              <a:defRPr sz="1200"/>
-            </a:lvl1pPr>
-          </a:lstStyle>
-          <a:p>
-            <a:fld id="{CE5E9CC1-C706-0F49-92D6-E571CC5EEA8F}" type="slidenum">
-              <a:rPr lang="en-US"/>
-              <a:t>‹#›</a:t>
-            </a:fld>
-            <a:endParaRPr lang="en-US"/>
-          </a:p>
-        </p:txBody>
-      </p:sp>
     </p:spTree>
     <p:extLst>
       <p:ext uri="{BB962C8B-B14F-4D97-AF65-F5344CB8AC3E}">
-        <p14:creationId xmlns:p14="http://schemas.microsoft.com/office/powerpoint/2010/main" val="1024086991"/>
+        <p14:creationId xmlns:p14="http://schemas.microsoft.com/office/powerpoint/2010/main" val="3695513299"/>
       </p:ext>
     </p:extLst>
   </p:cSld>
@@ -843,10 +650,6 @@
           <a:bodyPr/>
           <a:lstStyle/>
           <a:p>
-            <a:r>
-              <a:rPr lang="en-US" dirty="0"/>
-              <a:t/>
-            </a:r>
             <a:endParaRPr lang="en-US" dirty="0"/>
           </a:p>
         </p:txBody>
@@ -931,10 +734,6 @@
           <a:bodyPr/>
           <a:lstStyle/>
           <a:p>
-            <a:r>
-              <a:rPr lang="en-US" dirty="0"/>
-              <a:t/>
-            </a:r>
             <a:endParaRPr lang="en-US" dirty="0"/>
           </a:p>
         </p:txBody>
@@ -1019,10 +818,6 @@
           <a:bodyPr/>
           <a:lstStyle/>
           <a:p>
-            <a:r>
-              <a:rPr lang="en-US" dirty="0"/>
-              <a:t/>
-            </a:r>
             <a:endParaRPr lang="en-US" dirty="0"/>
           </a:p>
         </p:txBody>
@@ -1107,10 +902,6 @@
           <a:bodyPr/>
           <a:lstStyle/>
           <a:p>
-            <a:r>
-              <a:rPr lang="en-US" dirty="0"/>
-              <a:t/>
-            </a:r>
             <a:endParaRPr lang="en-US" dirty="0"/>
           </a:p>
         </p:txBody>
@@ -1195,10 +986,6 @@
           <a:bodyPr/>
           <a:lstStyle/>
           <a:p>
-            <a:r>
-              <a:rPr lang="en-US" dirty="0"/>
-              <a:t/>
-            </a:r>
             <a:endParaRPr lang="en-US" dirty="0"/>
           </a:p>
         </p:txBody>
@@ -1283,10 +1070,6 @@
           <a:bodyPr/>
           <a:lstStyle/>
           <a:p>
-            <a:r>
-              <a:rPr lang="en-US" dirty="0"/>
-              <a:t/>
-            </a:r>
             <a:endParaRPr lang="en-US" dirty="0"/>
           </a:p>
         </p:txBody>
@@ -1360,6 +1143,11 @@
 <file path=ppt/slideMasters/slideMaster1.xml><?xml version="1.0" encoding="utf-8"?>
 <p:sldMaster xmlns:a="http://schemas.openxmlformats.org/drawingml/2006/main" xmlns:r="http://schemas.openxmlformats.org/officeDocument/2006/relationships" xmlns:p="http://schemas.openxmlformats.org/presentationml/2006/main">
   <p:cSld>
+    <p:bg>
+      <p:bgRef idx="1001">
+        <a:schemeClr val="bg1"/>
+      </p:bgRef>
+    </p:bg>
     <p:spTree>
       <p:nvGrpSpPr>
         <p:cNvPr id="1" name=""/>
@@ -1642,6 +1430,7 @@
         <a:solidFill>
           <a:srgbClr val="0D1B2A"/>
         </a:solidFill>
+        <a:effectLst/>
       </p:bgPr>
     </p:bg>
     <p:spTree>
@@ -1764,11 +1553,11 @@
           <a:bodyPr wrap="square" lIns="0" tIns="0" rIns="0" bIns="0" rtlCol="0" anchor="ctr"/>
           <a:lstStyle/>
           <a:p>
-            <a:pPr algn="ctr" indent="0" marL="0">
+            <a:pPr marL="0" indent="0" algn="ctr">
               <a:buNone/>
             </a:pPr>
             <a:r>
-              <a:rPr lang="en-US" sz="750" b="1" spc="100" kern="0" dirty="0">
+              <a:rPr lang="en-US" sz="750" b="1" kern="0" spc="100" dirty="0">
                 <a:solidFill>
                   <a:srgbClr val="0D1B2A"/>
                 </a:solidFill>
@@ -1800,7 +1589,7 @@
           <a:bodyPr wrap="square" rtlCol="0" anchor="t"/>
           <a:lstStyle/>
           <a:p>
-            <a:pPr algn="l" indent="0" marL="0">
+            <a:pPr marL="0" indent="0" algn="l">
               <a:buNone/>
             </a:pPr>
             <a:r>
@@ -1817,7 +1606,7 @@
             <a:endParaRPr lang="en-US" sz="3600" dirty="0"/>
           </a:p>
           <a:p>
-            <a:pPr algn="l" indent="0" marL="0">
+            <a:pPr marL="0" indent="0" algn="l">
               <a:buNone/>
             </a:pPr>
             <a:r>
@@ -1834,7 +1623,7 @@
             <a:endParaRPr lang="en-US" sz="3600" dirty="0"/>
           </a:p>
           <a:p>
-            <a:pPr algn="l" indent="0" marL="0">
+            <a:pPr marL="0" indent="0" algn="l">
               <a:buNone/>
             </a:pPr>
             <a:r>
@@ -1873,7 +1662,7 @@
           <a:bodyPr wrap="square" rtlCol="0" anchor="ctr"/>
           <a:lstStyle/>
           <a:p>
-            <a:pPr algn="l" indent="0" marL="0">
+            <a:pPr marL="0" indent="0" algn="l">
               <a:buNone/>
             </a:pPr>
             <a:r>
@@ -1909,7 +1698,7 @@
           <a:bodyPr wrap="square" rtlCol="0" anchor="ctr"/>
           <a:lstStyle/>
           <a:p>
-            <a:pPr algn="l" indent="0" marL="0">
+            <a:pPr marL="0" indent="0" algn="l">
               <a:buNone/>
             </a:pPr>
             <a:r>
@@ -1968,7 +1757,7 @@
           <a:bodyPr wrap="square" rtlCol="0" anchor="ctr"/>
           <a:lstStyle/>
           <a:p>
-            <a:pPr algn="l" indent="0" marL="0">
+            <a:pPr marL="0" indent="0" algn="l">
               <a:buNone/>
             </a:pPr>
             <a:r>
@@ -1979,9 +1768,6 @@
               </a:rPr>
               <a:t>Prof. Rafael Marconi   ·   </a:t>
             </a:r>
-            <a:pPr algn="l" indent="0" marL="0">
-              <a:buNone/>
-            </a:pPr>
             <a:r>
               <a:rPr lang="en-US" sz="1000" b="1" dirty="0">
                 <a:solidFill>
@@ -1990,7 +1776,30 @@
               </a:rPr>
               <a:t>Filipe Ferreira  &amp;  Max Muller</a:t>
             </a:r>
-            <a:pPr algn="l" indent="0" marL="0">
+            <a:r>
+              <a:rPr lang="en-US" sz="1000" dirty="0">
+                <a:solidFill>
+                  <a:srgbClr val="ADB8C5"/>
+                </a:solidFill>
+              </a:rPr>
+              <a:t>   ·   ANÁLISE E DESENVOLVIMENTO DE SOFTWARE &amp; </a:t>
+            </a:r>
+            <a:r>
+              <a:rPr lang="en-US" sz="1000" dirty="0" err="1">
+                <a:solidFill>
+                  <a:srgbClr val="ADB8C5"/>
+                </a:solidFill>
+              </a:rPr>
+              <a:t>Sistemas</a:t>
+            </a:r>
+            <a:endParaRPr lang="en-US" sz="1000" dirty="0">
+              <a:solidFill>
+                <a:srgbClr val="ADB8C5"/>
+              </a:solidFill>
+            </a:endParaRPr>
+          </a:p>
+          <a:p>
+            <a:pPr marL="0" indent="0" algn="l">
               <a:buNone/>
             </a:pPr>
             <a:r>
@@ -1999,7 +1808,15 @@
                   <a:srgbClr val="ADB8C5"/>
                 </a:solidFill>
               </a:rPr>
-              <a:t>   ·   Sistemas de Informação</a:t>
+              <a:t> de </a:t>
+            </a:r>
+            <a:r>
+              <a:rPr lang="en-US" sz="1000" dirty="0" err="1">
+                <a:solidFill>
+                  <a:srgbClr val="ADB8C5"/>
+                </a:solidFill>
+              </a:rPr>
+              <a:t>Informação</a:t>
             </a:r>
             <a:endParaRPr lang="en-US" sz="1000" dirty="0"/>
           </a:p>
@@ -2021,6 +1838,7 @@
         <a:solidFill>
           <a:srgbClr val="EDF6F9"/>
         </a:solidFill>
+        <a:effectLst/>
       </p:bgPr>
     </p:bg>
     <p:spTree>
@@ -2083,7 +1901,7 @@
           <a:bodyPr wrap="square" lIns="0" tIns="0" rIns="0" bIns="0" rtlCol="0" anchor="ctr"/>
           <a:lstStyle/>
           <a:p>
-            <a:pPr algn="l" indent="0" marL="0">
+            <a:pPr marL="0" indent="0" algn="l">
               <a:buNone/>
             </a:pPr>
             <a:r>
@@ -2122,7 +1940,7 @@
           <a:bodyPr wrap="square" rtlCol="0" anchor="ctr"/>
           <a:lstStyle/>
           <a:p>
-            <a:pPr algn="l" indent="0" marL="0">
+            <a:pPr marL="0" indent="0" algn="l">
               <a:buNone/>
             </a:pPr>
             <a:r>
@@ -2163,7 +1981,7 @@
             <a:prstDash val="solid"/>
           </a:ln>
           <a:effectLst>
-            <a:outerShdw sx="100000" sy="100000" kx="0" ky="0" algn="bl" rotWithShape="0" blurRad="101600" dist="38100" dir="2700000">
+            <a:outerShdw blurRad="101600" dist="38100" dir="2700000" algn="bl" rotWithShape="0">
               <a:srgbClr val="000000">
                 <a:alpha val="18000"/>
               </a:srgbClr>
@@ -2192,7 +2010,7 @@
           <a:bodyPr wrap="square" rtlCol="0" anchor="ctr"/>
           <a:lstStyle/>
           <a:p>
-            <a:pPr algn="ctr" indent="0" marL="0">
+            <a:pPr marL="0" indent="0" algn="ctr">
               <a:buNone/>
             </a:pPr>
             <a:r>
@@ -2228,7 +2046,7 @@
           <a:bodyPr wrap="square" lIns="0" tIns="0" rIns="0" bIns="0" rtlCol="0" anchor="ctr"/>
           <a:lstStyle/>
           <a:p>
-            <a:pPr algn="l" indent="0" marL="0">
+            <a:pPr marL="0" indent="0" algn="l">
               <a:buNone/>
             </a:pPr>
             <a:r>
@@ -2264,7 +2082,7 @@
           <a:bodyPr wrap="square" lIns="0" tIns="0" rIns="0" bIns="0" rtlCol="0" anchor="ctr"/>
           <a:lstStyle/>
           <a:p>
-            <a:pPr algn="l" indent="0" marL="0">
+            <a:pPr marL="0" indent="0" algn="l">
               <a:buNone/>
             </a:pPr>
             <a:r>
@@ -2305,7 +2123,7 @@
             <a:prstDash val="solid"/>
           </a:ln>
           <a:effectLst>
-            <a:outerShdw sx="100000" sy="100000" kx="0" ky="0" algn="bl" rotWithShape="0" blurRad="101600" dist="38100" dir="2700000">
+            <a:outerShdw blurRad="101600" dist="38100" dir="2700000" algn="bl" rotWithShape="0">
               <a:srgbClr val="000000">
                 <a:alpha val="18000"/>
               </a:srgbClr>
@@ -2334,7 +2152,7 @@
           <a:bodyPr wrap="square" rtlCol="0" anchor="ctr"/>
           <a:lstStyle/>
           <a:p>
-            <a:pPr algn="ctr" indent="0" marL="0">
+            <a:pPr marL="0" indent="0" algn="ctr">
               <a:buNone/>
             </a:pPr>
             <a:r>
@@ -2370,7 +2188,7 @@
           <a:bodyPr wrap="square" lIns="0" tIns="0" rIns="0" bIns="0" rtlCol="0" anchor="ctr"/>
           <a:lstStyle/>
           <a:p>
-            <a:pPr algn="l" indent="0" marL="0">
+            <a:pPr marL="0" indent="0" algn="l">
               <a:buNone/>
             </a:pPr>
             <a:r>
@@ -2406,7 +2224,7 @@
           <a:bodyPr wrap="square" lIns="0" tIns="0" rIns="0" bIns="0" rtlCol="0" anchor="ctr"/>
           <a:lstStyle/>
           <a:p>
-            <a:pPr algn="l" indent="0" marL="0">
+            <a:pPr marL="0" indent="0" algn="l">
               <a:buNone/>
             </a:pPr>
             <a:r>
@@ -2447,7 +2265,7 @@
             <a:prstDash val="solid"/>
           </a:ln>
           <a:effectLst>
-            <a:outerShdw sx="100000" sy="100000" kx="0" ky="0" algn="bl" rotWithShape="0" blurRad="101600" dist="38100" dir="2700000">
+            <a:outerShdw blurRad="101600" dist="38100" dir="2700000" algn="bl" rotWithShape="0">
               <a:srgbClr val="000000">
                 <a:alpha val="18000"/>
               </a:srgbClr>
@@ -2476,7 +2294,7 @@
           <a:bodyPr wrap="square" rtlCol="0" anchor="ctr"/>
           <a:lstStyle/>
           <a:p>
-            <a:pPr algn="ctr" indent="0" marL="0">
+            <a:pPr marL="0" indent="0" algn="ctr">
               <a:buNone/>
             </a:pPr>
             <a:r>
@@ -2512,7 +2330,7 @@
           <a:bodyPr wrap="square" lIns="0" tIns="0" rIns="0" bIns="0" rtlCol="0" anchor="ctr"/>
           <a:lstStyle/>
           <a:p>
-            <a:pPr algn="l" indent="0" marL="0">
+            <a:pPr marL="0" indent="0" algn="l">
               <a:buNone/>
             </a:pPr>
             <a:r>
@@ -2548,7 +2366,7 @@
           <a:bodyPr wrap="square" lIns="0" tIns="0" rIns="0" bIns="0" rtlCol="0" anchor="ctr"/>
           <a:lstStyle/>
           <a:p>
-            <a:pPr algn="l" indent="0" marL="0">
+            <a:pPr marL="0" indent="0" algn="l">
               <a:buNone/>
             </a:pPr>
             <a:r>
@@ -2589,7 +2407,7 @@
             <a:prstDash val="solid"/>
           </a:ln>
           <a:effectLst>
-            <a:outerShdw sx="100000" sy="100000" kx="0" ky="0" algn="bl" rotWithShape="0" blurRad="101600" dist="38100" dir="2700000">
+            <a:outerShdw blurRad="101600" dist="38100" dir="2700000" algn="bl" rotWithShape="0">
               <a:srgbClr val="000000">
                 <a:alpha val="18000"/>
               </a:srgbClr>
@@ -2618,7 +2436,7 @@
           <a:bodyPr wrap="square" rtlCol="0" anchor="ctr"/>
           <a:lstStyle/>
           <a:p>
-            <a:pPr algn="ctr" indent="0" marL="0">
+            <a:pPr marL="0" indent="0" algn="ctr">
               <a:buNone/>
             </a:pPr>
             <a:r>
@@ -2654,7 +2472,7 @@
           <a:bodyPr wrap="square" rtlCol="0" anchor="ctr"/>
           <a:lstStyle/>
           <a:p>
-            <a:pPr algn="ctr" indent="0" marL="0">
+            <a:pPr marL="0" indent="0" algn="ctr">
               <a:buNone/>
             </a:pPr>
             <a:r>
@@ -2690,7 +2508,7 @@
           <a:bodyPr wrap="square" lIns="0" tIns="0" rIns="0" bIns="0" rtlCol="0" anchor="ctr"/>
           <a:lstStyle/>
           <a:p>
-            <a:pPr algn="ctr" indent="0" marL="0">
+            <a:pPr marL="0" indent="0" algn="ctr">
               <a:buNone/>
             </a:pPr>
             <a:r>
@@ -2726,7 +2544,7 @@
           <a:bodyPr wrap="square" lIns="0" tIns="0" rIns="0" bIns="0" rtlCol="0" anchor="ctr"/>
           <a:lstStyle/>
           <a:p>
-            <a:pPr algn="ctr" indent="0" marL="0">
+            <a:pPr marL="0" indent="0" algn="ctr">
               <a:buNone/>
             </a:pPr>
             <a:r>
@@ -2762,7 +2580,7 @@
           <a:bodyPr wrap="square" lIns="0" tIns="0" rIns="0" bIns="0" rtlCol="0" anchor="ctr"/>
           <a:lstStyle/>
           <a:p>
-            <a:pPr algn="ctr" indent="0" marL="0">
+            <a:pPr marL="0" indent="0" algn="ctr">
               <a:buNone/>
             </a:pPr>
             <a:r>
@@ -2798,7 +2616,7 @@
           <a:bodyPr wrap="square" lIns="0" tIns="0" rIns="0" bIns="0" rtlCol="0" anchor="ctr"/>
           <a:lstStyle/>
           <a:p>
-            <a:pPr algn="ctr" indent="0" marL="0">
+            <a:pPr marL="0" indent="0" algn="ctr">
               <a:buNone/>
             </a:pPr>
             <a:r>
@@ -2834,7 +2652,7 @@
           <a:bodyPr wrap="square" lIns="0" tIns="0" rIns="0" bIns="0" rtlCol="0" anchor="ctr"/>
           <a:lstStyle/>
           <a:p>
-            <a:pPr algn="ctr" indent="0" marL="0">
+            <a:pPr marL="0" indent="0" algn="ctr">
               <a:buNone/>
             </a:pPr>
             <a:r>
@@ -2870,7 +2688,7 @@
           <a:bodyPr wrap="square" lIns="0" tIns="0" rIns="0" bIns="0" rtlCol="0" anchor="ctr"/>
           <a:lstStyle/>
           <a:p>
-            <a:pPr algn="ctr" indent="0" marL="0">
+            <a:pPr marL="0" indent="0" algn="ctr">
               <a:buNone/>
             </a:pPr>
             <a:r>
@@ -2906,7 +2724,7 @@
           <a:bodyPr wrap="square" lIns="0" tIns="0" rIns="0" bIns="0" rtlCol="0" anchor="ctr"/>
           <a:lstStyle/>
           <a:p>
-            <a:pPr algn="ctr" indent="0" marL="0">
+            <a:pPr marL="0" indent="0" algn="ctr">
               <a:buNone/>
             </a:pPr>
             <a:r>
@@ -2942,7 +2760,7 @@
           <a:bodyPr wrap="square" lIns="0" tIns="0" rIns="0" bIns="0" rtlCol="0" anchor="ctr"/>
           <a:lstStyle/>
           <a:p>
-            <a:pPr algn="ctr" indent="0" marL="0">
+            <a:pPr marL="0" indent="0" algn="ctr">
               <a:buNone/>
             </a:pPr>
             <a:r>
@@ -2973,6 +2791,7 @@
         <a:solidFill>
           <a:srgbClr val="0D1B2A"/>
         </a:solidFill>
+        <a:effectLst/>
       </p:bgPr>
     </p:bg>
     <p:spTree>
@@ -3035,7 +2854,7 @@
           <a:bodyPr wrap="square" lIns="0" tIns="0" rIns="0" bIns="0" rtlCol="0" anchor="ctr"/>
           <a:lstStyle/>
           <a:p>
-            <a:pPr algn="l" indent="0" marL="0">
+            <a:pPr marL="0" indent="0" algn="l">
               <a:buNone/>
             </a:pPr>
             <a:r>
@@ -3103,7 +2922,7 @@
           <a:bodyPr wrap="square" lIns="0" tIns="0" rIns="0" bIns="0" rtlCol="0" anchor="ctr"/>
           <a:lstStyle/>
           <a:p>
-            <a:pPr algn="ctr" indent="0" marL="0">
+            <a:pPr marL="0" indent="0" algn="ctr">
               <a:buNone/>
             </a:pPr>
             <a:r>
@@ -3139,7 +2958,7 @@
           <a:bodyPr wrap="square" rtlCol="0" anchor="ctr"/>
           <a:lstStyle/>
           <a:p>
-            <a:pPr algn="ctr" indent="0" marL="0">
+            <a:pPr marL="0" indent="0" algn="ctr">
               <a:buNone/>
             </a:pPr>
             <a:r>
@@ -3204,7 +3023,7 @@
           <a:bodyPr wrap="square" lIns="0" tIns="0" rIns="0" bIns="0" rtlCol="0" anchor="ctr"/>
           <a:lstStyle/>
           <a:p>
-            <a:pPr algn="ctr" indent="0" marL="0">
+            <a:pPr marL="0" indent="0" algn="ctr">
               <a:buNone/>
             </a:pPr>
             <a:r>
@@ -3240,7 +3059,7 @@
           <a:bodyPr wrap="square" rtlCol="0" anchor="ctr"/>
           <a:lstStyle/>
           <a:p>
-            <a:pPr algn="ctr" indent="0" marL="0">
+            <a:pPr marL="0" indent="0" algn="ctr">
               <a:buNone/>
             </a:pPr>
             <a:r>
@@ -3305,7 +3124,7 @@
           <a:bodyPr wrap="square" lIns="0" tIns="0" rIns="0" bIns="0" rtlCol="0" anchor="ctr"/>
           <a:lstStyle/>
           <a:p>
-            <a:pPr algn="ctr" indent="0" marL="0">
+            <a:pPr marL="0" indent="0" algn="ctr">
               <a:buNone/>
             </a:pPr>
             <a:r>
@@ -3341,7 +3160,7 @@
           <a:bodyPr wrap="square" rtlCol="0" anchor="ctr"/>
           <a:lstStyle/>
           <a:p>
-            <a:pPr algn="ctr" indent="0" marL="0">
+            <a:pPr marL="0" indent="0" algn="ctr">
               <a:buNone/>
             </a:pPr>
             <a:r>
@@ -3404,7 +3223,7 @@
           <a:bodyPr wrap="square" lIns="0" tIns="0" rIns="0" bIns="0" rtlCol="0" anchor="ctr"/>
           <a:lstStyle/>
           <a:p>
-            <a:pPr algn="ctr" indent="0" marL="0">
+            <a:pPr marL="0" indent="0" algn="ctr">
               <a:buNone/>
             </a:pPr>
             <a:r>
@@ -3440,7 +3259,7 @@
           <a:bodyPr wrap="square" rtlCol="0" anchor="ctr"/>
           <a:lstStyle/>
           <a:p>
-            <a:pPr algn="ctr" indent="0" marL="0">
+            <a:pPr marL="0" indent="0" algn="ctr">
               <a:buNone/>
             </a:pPr>
             <a:r>
@@ -3505,7 +3324,7 @@
           <a:bodyPr wrap="square" lIns="0" tIns="0" rIns="0" bIns="0" rtlCol="0" anchor="ctr"/>
           <a:lstStyle/>
           <a:p>
-            <a:pPr algn="ctr" indent="0" marL="0">
+            <a:pPr marL="0" indent="0" algn="ctr">
               <a:buNone/>
             </a:pPr>
             <a:r>
@@ -3541,7 +3360,7 @@
           <a:bodyPr wrap="square" rtlCol="0" anchor="ctr"/>
           <a:lstStyle/>
           <a:p>
-            <a:pPr algn="l" indent="0" marL="0">
+            <a:pPr marL="0" indent="0" algn="l">
               <a:buNone/>
             </a:pPr>
             <a:r>
@@ -3604,7 +3423,7 @@
           <a:bodyPr wrap="square" lIns="0" tIns="0" rIns="0" bIns="0" rtlCol="0" anchor="ctr"/>
           <a:lstStyle/>
           <a:p>
-            <a:pPr algn="l" indent="0" marL="0">
+            <a:pPr marL="0" indent="0" algn="l">
               <a:buNone/>
             </a:pPr>
             <a:r>
@@ -3640,7 +3459,7 @@
           <a:bodyPr wrap="square" lIns="0" tIns="0" rIns="0" bIns="0" rtlCol="0" anchor="ctr"/>
           <a:lstStyle/>
           <a:p>
-            <a:pPr algn="l" indent="0" marL="0">
+            <a:pPr marL="0" indent="0" algn="l">
               <a:buNone/>
             </a:pPr>
             <a:r>
@@ -3703,7 +3522,7 @@
           <a:bodyPr wrap="square" lIns="0" tIns="0" rIns="0" bIns="0" rtlCol="0" anchor="ctr"/>
           <a:lstStyle/>
           <a:p>
-            <a:pPr algn="l" indent="0" marL="0">
+            <a:pPr marL="0" indent="0" algn="l">
               <a:buNone/>
             </a:pPr>
             <a:r>
@@ -3739,7 +3558,7 @@
           <a:bodyPr wrap="square" lIns="0" tIns="0" rIns="0" bIns="0" rtlCol="0" anchor="ctr"/>
           <a:lstStyle/>
           <a:p>
-            <a:pPr algn="l" indent="0" marL="0">
+            <a:pPr marL="0" indent="0" algn="l">
               <a:buNone/>
             </a:pPr>
             <a:r>
@@ -3802,7 +3621,7 @@
           <a:bodyPr wrap="square" lIns="0" tIns="0" rIns="0" bIns="0" rtlCol="0" anchor="ctr"/>
           <a:lstStyle/>
           <a:p>
-            <a:pPr algn="l" indent="0" marL="0">
+            <a:pPr marL="0" indent="0" algn="l">
               <a:buNone/>
             </a:pPr>
             <a:r>
@@ -3838,7 +3657,7 @@
           <a:bodyPr wrap="square" lIns="0" tIns="0" rIns="0" bIns="0" rtlCol="0" anchor="ctr"/>
           <a:lstStyle/>
           <a:p>
-            <a:pPr algn="l" indent="0" marL="0">
+            <a:pPr marL="0" indent="0" algn="l">
               <a:buNone/>
             </a:pPr>
             <a:r>
@@ -3879,6 +3698,13 @@
             <a:prstDash val="solid"/>
           </a:ln>
         </p:spPr>
+        <p:txBody>
+          <a:bodyPr/>
+          <a:lstStyle/>
+          <a:p>
+            <a:endParaRPr lang="pt-BR" dirty="0"/>
+          </a:p>
+        </p:txBody>
       </p:sp>
       <p:sp>
         <p:nvSpPr>
@@ -3901,16 +3727,16 @@
           <a:bodyPr wrap="square" lIns="0" tIns="0" rIns="0" bIns="0" rtlCol="0" anchor="ctr"/>
           <a:lstStyle/>
           <a:p>
-            <a:pPr algn="l" indent="0" marL="0">
+            <a:pPr marL="0" indent="0" algn="l">
               <a:buNone/>
             </a:pPr>
             <a:r>
-              <a:rPr lang="en-US" sz="1000" b="1" dirty="0">
+              <a:rPr lang="en-US" sz="1000" b="1" dirty="0" err="1">
                 <a:solidFill>
                   <a:srgbClr val="00B4D8"/>
                 </a:solidFill>
               </a:rPr>
-              <a:t>ProcessPoolExecutor</a:t>
+              <a:t>mp.Pool</a:t>
             </a:r>
             <a:endParaRPr lang="en-US" sz="1000" dirty="0"/>
           </a:p>
@@ -3937,18 +3763,59 @@
           <a:bodyPr wrap="square" lIns="0" tIns="0" rIns="0" bIns="0" rtlCol="0" anchor="ctr"/>
           <a:lstStyle/>
           <a:p>
-            <a:pPr algn="l" indent="0" marL="0">
-              <a:buNone/>
-            </a:pPr>
             <a:r>
-              <a:rPr lang="en-US" sz="850" dirty="0">
+              <a:rPr lang="pt-BR" sz="850" dirty="0">
                 <a:solidFill>
                   <a:srgbClr val="ADB8C5"/>
                 </a:solidFill>
               </a:rPr>
-              <a:t>Pool de workers paralelos</a:t>
+              <a:t>Pool de processos via </a:t>
             </a:r>
-            <a:endParaRPr lang="en-US" sz="850" dirty="0"/>
+            <a:r>
+              <a:rPr lang="pt-BR" sz="850" dirty="0" err="1">
+                <a:solidFill>
+                  <a:srgbClr val="ADB8C5"/>
+                </a:solidFill>
+              </a:rPr>
+              <a:t>pool.map</a:t>
+            </a:r>
+            <a:r>
+              <a:rPr lang="pt-BR" sz="850" dirty="0">
+                <a:solidFill>
+                  <a:srgbClr val="ADB8C5"/>
+                </a:solidFill>
+              </a:rPr>
+              <a:t>() — distribui </a:t>
+            </a:r>
+            <a:r>
+              <a:rPr lang="pt-BR" sz="850" dirty="0" err="1">
+                <a:solidFill>
+                  <a:srgbClr val="ADB8C5"/>
+                </a:solidFill>
+              </a:rPr>
+              <a:t>chunks</a:t>
+            </a:r>
+            <a:r>
+              <a:rPr lang="pt-BR" sz="850" dirty="0">
+                <a:solidFill>
+                  <a:srgbClr val="ADB8C5"/>
+                </a:solidFill>
+              </a:rPr>
+              <a:t> entre </a:t>
+            </a:r>
+            <a:r>
+              <a:rPr lang="pt-BR" sz="850" dirty="0" err="1">
+                <a:solidFill>
+                  <a:srgbClr val="ADB8C5"/>
+                </a:solidFill>
+              </a:rPr>
+              <a:t>workers</a:t>
+            </a:r>
+            <a:endParaRPr lang="en-US" sz="850" dirty="0">
+              <a:solidFill>
+                <a:srgbClr val="ADB8C5"/>
+              </a:solidFill>
+            </a:endParaRPr>
           </a:p>
         </p:txBody>
       </p:sp>
@@ -4000,7 +3867,7 @@
           <a:bodyPr wrap="square" lIns="0" tIns="0" rIns="0" bIns="0" rtlCol="0" anchor="ctr"/>
           <a:lstStyle/>
           <a:p>
-            <a:pPr algn="l" indent="0" marL="0">
+            <a:pPr marL="0" indent="0" algn="l">
               <a:buNone/>
             </a:pPr>
             <a:r>
@@ -4036,7 +3903,7 @@
           <a:bodyPr wrap="square" lIns="0" tIns="0" rIns="0" bIns="0" rtlCol="0" anchor="ctr"/>
           <a:lstStyle/>
           <a:p>
-            <a:pPr algn="l" indent="0" marL="0">
+            <a:pPr marL="0" indent="0" algn="l">
               <a:buNone/>
             </a:pPr>
             <a:r>
@@ -4099,7 +3966,7 @@
           <a:bodyPr wrap="square" lIns="0" tIns="0" rIns="0" bIns="0" rtlCol="0" anchor="ctr"/>
           <a:lstStyle/>
           <a:p>
-            <a:pPr algn="l" indent="0" marL="0">
+            <a:pPr marL="0" indent="0" algn="l">
               <a:buNone/>
             </a:pPr>
             <a:r>
@@ -4135,7 +4002,7 @@
           <a:bodyPr wrap="square" lIns="0" tIns="0" rIns="0" bIns="0" rtlCol="0" anchor="ctr"/>
           <a:lstStyle/>
           <a:p>
-            <a:pPr algn="l" indent="0" marL="0">
+            <a:pPr marL="0" indent="0" algn="l">
               <a:buNone/>
             </a:pPr>
             <a:r>
@@ -4166,6 +4033,7 @@
         <a:solidFill>
           <a:srgbClr val="EDF6F9"/>
         </a:solidFill>
+        <a:effectLst/>
       </p:bgPr>
     </p:bg>
     <p:spTree>
@@ -4228,7 +4096,7 @@
           <a:bodyPr wrap="square" lIns="0" tIns="0" rIns="0" bIns="0" rtlCol="0" anchor="ctr"/>
           <a:lstStyle/>
           <a:p>
-            <a:pPr algn="l" indent="0" marL="0">
+            <a:pPr marL="0" indent="0" algn="l">
               <a:buNone/>
             </a:pPr>
             <a:r>
@@ -4272,7 +4140,7 @@
             <a:prstDash val="solid"/>
           </a:ln>
           <a:effectLst>
-            <a:outerShdw sx="100000" sy="100000" kx="0" ky="0" algn="bl" rotWithShape="0" blurRad="101600" dist="38100" dir="2700000">
+            <a:outerShdw blurRad="101600" dist="38100" dir="2700000" algn="bl" rotWithShape="0">
               <a:srgbClr val="000000">
                 <a:alpha val="18000"/>
               </a:srgbClr>
@@ -4301,7 +4169,7 @@
           <a:bodyPr wrap="square" lIns="0" tIns="0" rIns="0" bIns="0" rtlCol="0" anchor="ctr"/>
           <a:lstStyle/>
           <a:p>
-            <a:pPr algn="ctr" indent="0" marL="0">
+            <a:pPr marL="0" indent="0" algn="ctr">
               <a:buNone/>
             </a:pPr>
             <a:r>
@@ -4337,7 +4205,7 @@
           <a:bodyPr wrap="square" lIns="0" tIns="0" rIns="0" bIns="0" rtlCol="0" anchor="ctr"/>
           <a:lstStyle/>
           <a:p>
-            <a:pPr algn="ctr" indent="0" marL="0">
+            <a:pPr marL="0" indent="0" algn="ctr">
               <a:buNone/>
             </a:pPr>
             <a:r>
@@ -4373,7 +4241,7 @@
           <a:bodyPr wrap="square" lIns="0" tIns="0" rIns="0" bIns="0" rtlCol="0" anchor="ctr"/>
           <a:lstStyle/>
           <a:p>
-            <a:pPr algn="ctr" indent="0" marL="0">
+            <a:pPr marL="0" indent="0" algn="ctr">
               <a:buNone/>
             </a:pPr>
             <a:r>
@@ -4414,7 +4282,7 @@
             <a:prstDash val="solid"/>
           </a:ln>
           <a:effectLst>
-            <a:outerShdw sx="100000" sy="100000" kx="0" ky="0" algn="bl" rotWithShape="0" blurRad="101600" dist="38100" dir="2700000">
+            <a:outerShdw blurRad="101600" dist="38100" dir="2700000" algn="bl" rotWithShape="0">
               <a:srgbClr val="000000">
                 <a:alpha val="18000"/>
               </a:srgbClr>
@@ -4443,7 +4311,7 @@
           <a:bodyPr wrap="square" lIns="0" tIns="0" rIns="0" bIns="0" rtlCol="0" anchor="ctr"/>
           <a:lstStyle/>
           <a:p>
-            <a:pPr algn="ctr" indent="0" marL="0">
+            <a:pPr marL="0" indent="0" algn="ctr">
               <a:buNone/>
             </a:pPr>
             <a:r>
@@ -4479,7 +4347,7 @@
           <a:bodyPr wrap="square" lIns="0" tIns="0" rIns="0" bIns="0" rtlCol="0" anchor="ctr"/>
           <a:lstStyle/>
           <a:p>
-            <a:pPr algn="ctr" indent="0" marL="0">
+            <a:pPr marL="0" indent="0" algn="ctr">
               <a:buNone/>
             </a:pPr>
             <a:r>
@@ -4515,7 +4383,7 @@
           <a:bodyPr wrap="square" lIns="0" tIns="0" rIns="0" bIns="0" rtlCol="0" anchor="ctr"/>
           <a:lstStyle/>
           <a:p>
-            <a:pPr algn="ctr" indent="0" marL="0">
+            <a:pPr marL="0" indent="0" algn="ctr">
               <a:buNone/>
             </a:pPr>
             <a:r>
@@ -4556,7 +4424,7 @@
             <a:prstDash val="solid"/>
           </a:ln>
           <a:effectLst>
-            <a:outerShdw sx="100000" sy="100000" kx="0" ky="0" algn="bl" rotWithShape="0" blurRad="101600" dist="38100" dir="2700000">
+            <a:outerShdw blurRad="101600" dist="38100" dir="2700000" algn="bl" rotWithShape="0">
               <a:srgbClr val="000000">
                 <a:alpha val="18000"/>
               </a:srgbClr>
@@ -4585,7 +4453,7 @@
           <a:bodyPr wrap="square" lIns="0" tIns="0" rIns="0" bIns="0" rtlCol="0" anchor="ctr"/>
           <a:lstStyle/>
           <a:p>
-            <a:pPr algn="ctr" indent="0" marL="0">
+            <a:pPr marL="0" indent="0" algn="ctr">
               <a:buNone/>
             </a:pPr>
             <a:r>
@@ -4621,7 +4489,7 @@
           <a:bodyPr wrap="square" lIns="0" tIns="0" rIns="0" bIns="0" rtlCol="0" anchor="ctr"/>
           <a:lstStyle/>
           <a:p>
-            <a:pPr algn="ctr" indent="0" marL="0">
+            <a:pPr marL="0" indent="0" algn="ctr">
               <a:buNone/>
             </a:pPr>
             <a:r>
@@ -4657,7 +4525,7 @@
           <a:bodyPr wrap="square" lIns="0" tIns="0" rIns="0" bIns="0" rtlCol="0" anchor="ctr"/>
           <a:lstStyle/>
           <a:p>
-            <a:pPr algn="ctr" indent="0" marL="0">
+            <a:pPr marL="0" indent="0" algn="ctr">
               <a:buNone/>
             </a:pPr>
             <a:r>
@@ -4674,7 +4542,7 @@
       </p:sp>
       <p:graphicFrame>
         <p:nvGraphicFramePr>
-          <p:cNvPr id="16" name="Chart 0" descr=""/>
+          <p:cNvPr id="16" name="Chart 0"/>
           <p:cNvGraphicFramePr/>
           <p:nvPr/>
         </p:nvGraphicFramePr>
@@ -4682,9 +4550,9 @@
           <a:off x="411480" y="2148840"/>
           <a:ext cx="5303520" cy="2651760"/>
         </p:xfrm>
-        <a:graphic xmlns:a="http://schemas.openxmlformats.org/drawingml/2006/main">
+        <a:graphic>
           <a:graphicData uri="http://schemas.openxmlformats.org/drawingml/2006/chart">
-            <c:chart xmlns:c="http://schemas.openxmlformats.org/drawingml/2006/chart" r:id="rId1"/>
+            <c:chart xmlns:c="http://schemas.openxmlformats.org/drawingml/2006/chart" xmlns:r="http://schemas.openxmlformats.org/officeDocument/2006/relationships" r:id="rId3"/>
           </a:graphicData>
         </a:graphic>
       </p:graphicFrame>
@@ -4714,7 +4582,7 @@
             <a:prstDash val="solid"/>
           </a:ln>
           <a:effectLst>
-            <a:outerShdw sx="100000" sy="100000" kx="0" ky="0" algn="bl" rotWithShape="0" blurRad="101600" dist="38100" dir="2700000">
+            <a:outerShdw blurRad="101600" dist="38100" dir="2700000" algn="bl" rotWithShape="0">
               <a:srgbClr val="000000">
                 <a:alpha val="18000"/>
               </a:srgbClr>
@@ -4743,7 +4611,7 @@
           <a:bodyPr wrap="square" rtlCol="0" anchor="ctr"/>
           <a:lstStyle/>
           <a:p>
-            <a:pPr algn="l" indent="0" marL="0">
+            <a:pPr marL="0" indent="0" algn="l">
               <a:buNone/>
             </a:pPr>
             <a:r>
@@ -4779,7 +4647,7 @@
           <a:bodyPr wrap="square" rtlCol="0" anchor="t"/>
           <a:lstStyle/>
           <a:p>
-            <a:pPr indent="0" marL="0">
+            <a:pPr marL="0" indent="0">
               <a:buNone/>
             </a:pPr>
             <a:r>
@@ -4790,9 +4658,6 @@
               </a:rPr>
               <a:t>• Ganho de </a:t>
             </a:r>
-            <a:pPr indent="0" marL="0">
-              <a:buNone/>
-            </a:pPr>
             <a:r>
               <a:rPr lang="en-US" sz="950" b="1" dirty="0">
                 <a:solidFill>
@@ -4801,9 +4666,6 @@
               </a:rPr>
               <a:t>5.63× </a:t>
             </a:r>
-            <a:pPr indent="0" marL="0">
-              <a:buNone/>
-            </a:pPr>
             <a:r>
               <a:rPr lang="en-US" sz="950" dirty="0">
                 <a:solidFill>
@@ -4811,22 +4673,8 @@
                 </a:solidFill>
               </a:rPr>
               <a:t>com 12 workers
-</a:t>
+• Eficiência paralela: </a:t>
             </a:r>
-            <a:pPr indent="0" marL="0">
-              <a:buNone/>
-            </a:pPr>
-            <a:r>
-              <a:rPr lang="en-US" sz="950" dirty="0">
-                <a:solidFill>
-                  <a:srgbClr val="4A5568"/>
-                </a:solidFill>
-              </a:rPr>
-              <a:t>• Eficiência paralela: </a:t>
-            </a:r>
-            <a:pPr indent="0" marL="0">
-              <a:buNone/>
-            </a:pPr>
             <a:r>
               <a:rPr lang="en-US" sz="950" b="1" dirty="0">
                 <a:solidFill>
@@ -4835,9 +4683,6 @@
               </a:rPr>
               <a:t>cai de 90% → 47%</a:t>
             </a:r>
-            <a:pPr indent="0" marL="0">
-              <a:buNone/>
-            </a:pPr>
             <a:r>
               <a:rPr lang="en-US" sz="950" dirty="0">
                 <a:solidFill>
@@ -4845,30 +4690,8 @@
                 </a:solidFill>
               </a:rPr>
               <a:t> conforme workers aumentam
-</a:t>
-            </a:r>
-            <a:pPr indent="0" marL="0">
-              <a:buNone/>
-            </a:pPr>
-            <a:r>
-              <a:rPr lang="en-US" sz="950" dirty="0">
-                <a:solidFill>
-                  <a:srgbClr val="4A5568"/>
-                </a:solidFill>
-              </a:rPr>
-              <a:t>• 8 workers: 26.80s | 12 workers: 22.50s
-</a:t>
-            </a:r>
-            <a:pPr indent="0" marL="0">
-              <a:buNone/>
-            </a:pPr>
-            <a:r>
-              <a:rPr lang="en-US" sz="950" dirty="0">
-                <a:solidFill>
-                  <a:srgbClr val="4A5568"/>
-                </a:solidFill>
-              </a:rPr>
-              <a:t>• 28,5M+ linhas processadas na análise completa</a:t>
+• 8 workers: 26.80s | 12 workers: 22.50s
+• 28,5M+ linhas processadas na análise completa</a:t>
             </a:r>
             <a:endParaRPr lang="en-US" sz="950" dirty="0"/>
           </a:p>
@@ -4890,6 +4713,7 @@
         <a:solidFill>
           <a:srgbClr val="0D1B2A"/>
         </a:solidFill>
+        <a:effectLst/>
       </p:bgPr>
     </p:bg>
     <p:spTree>
@@ -4952,7 +4776,7 @@
           <a:bodyPr wrap="square" lIns="0" tIns="0" rIns="0" bIns="0" rtlCol="0" anchor="ctr"/>
           <a:lstStyle/>
           <a:p>
-            <a:pPr algn="l" indent="0" marL="0">
+            <a:pPr marL="0" indent="0" algn="l">
               <a:buNone/>
             </a:pPr>
             <a:r>
@@ -4991,7 +4815,7 @@
           <a:bodyPr wrap="square" rtlCol="0" anchor="ctr"/>
           <a:lstStyle/>
           <a:p>
-            <a:pPr algn="l" indent="0" marL="0">
+            <a:pPr marL="0" indent="0" algn="l">
               <a:buNone/>
             </a:pPr>
             <a:r>
@@ -5029,9 +4853,27 @@
             <a:tbl>
               <a:tblPr/>
               <a:tblGrid>
-                <a:gridCol w="365760"/>
-                <a:gridCol w="2697480"/>
-                <a:gridCol w="1051560"/>
+                <a:gridCol w="365760">
+                  <a:extLst>
+                    <a:ext uri="{9D8B030D-6E8A-4147-A177-3AD203B41FA5}">
+                      <a16:colId xmlns:a16="http://schemas.microsoft.com/office/drawing/2014/main" val="20000"/>
+                    </a:ext>
+                  </a:extLst>
+                </a:gridCol>
+                <a:gridCol w="2697480">
+                  <a:extLst>
+                    <a:ext uri="{9D8B030D-6E8A-4147-A177-3AD203B41FA5}">
+                      <a16:colId xmlns:a16="http://schemas.microsoft.com/office/drawing/2014/main" val="20001"/>
+                    </a:ext>
+                  </a:extLst>
+                </a:gridCol>
+                <a:gridCol w="1051560">
+                  <a:extLst>
+                    <a:ext uri="{9D8B030D-6E8A-4147-A177-3AD203B41FA5}">
+                      <a16:colId xmlns:a16="http://schemas.microsoft.com/office/drawing/2014/main" val="20002"/>
+                    </a:ext>
+                  </a:extLst>
+                </a:gridCol>
               </a:tblGrid>
               <a:tr h="356616">
                 <a:tc>
@@ -5039,7 +4881,7 @@
                     <a:bodyPr/>
                     <a:lstStyle/>
                     <a:p>
-                      <a:pPr algn="ctr" indent="0" marL="0">
+                      <a:pPr marL="0" indent="0" algn="ctr">
                         <a:buNone/>
                       </a:pPr>
                       <a:r>
@@ -5060,7 +4902,7 @@
                       </a:endParaRPr>
                     </a:p>
                   </a:txBody>
-                  <a:tcPr marL="91440" marR="91440" marT="45720" marB="45720">
+                  <a:tcPr>
                     <a:lnL w="6350" cap="flat" cmpd="sng" algn="ctr">
                       <a:solidFill>
                         <a:srgbClr val="1E3A52"/>
@@ -5107,7 +4949,7 @@
                     <a:bodyPr/>
                     <a:lstStyle/>
                     <a:p>
-                      <a:pPr indent="0" marL="0">
+                      <a:pPr marL="0" indent="0">
                         <a:buNone/>
                       </a:pPr>
                       <a:r>
@@ -5128,7 +4970,7 @@
                       </a:endParaRPr>
                     </a:p>
                   </a:txBody>
-                  <a:tcPr marL="91440" marR="91440" marT="45720" marB="45720">
+                  <a:tcPr>
                     <a:lnL w="6350" cap="flat" cmpd="sng" algn="ctr">
                       <a:solidFill>
                         <a:srgbClr val="1E3A52"/>
@@ -5175,7 +5017,7 @@
                     <a:bodyPr/>
                     <a:lstStyle/>
                     <a:p>
-                      <a:pPr algn="r" indent="0" marL="0">
+                      <a:pPr marL="0" indent="0" algn="r">
                         <a:buNone/>
                       </a:pPr>
                       <a:r>
@@ -5196,7 +5038,7 @@
                       </a:endParaRPr>
                     </a:p>
                   </a:txBody>
-                  <a:tcPr marL="91440" marR="91440" marT="45720" marB="45720">
+                  <a:tcPr>
                     <a:lnL w="6350" cap="flat" cmpd="sng" algn="ctr">
                       <a:solidFill>
                         <a:srgbClr val="1E3A52"/>
@@ -5238,6 +5080,11 @@
                     </a:solidFill>
                   </a:tcPr>
                 </a:tc>
+                <a:extLst>
+                  <a:ext uri="{0D108BD9-81ED-4DB2-BD59-A6C34878D82A}">
+                    <a16:rowId xmlns:a16="http://schemas.microsoft.com/office/drawing/2014/main" val="10000"/>
+                  </a:ext>
+                </a:extLst>
               </a:tr>
               <a:tr h="356616">
                 <a:tc>
@@ -5245,7 +5092,7 @@
                     <a:bodyPr/>
                     <a:lstStyle/>
                     <a:p>
-                      <a:pPr algn="ctr" indent="0" marL="0">
+                      <a:pPr marL="0" indent="0" algn="ctr">
                         <a:buNone/>
                       </a:pPr>
                       <a:r>
@@ -5266,7 +5113,7 @@
                       </a:endParaRPr>
                     </a:p>
                   </a:txBody>
-                  <a:tcPr marL="91440" marR="91440" marT="45720" marB="45720">
+                  <a:tcPr>
                     <a:lnL w="6350" cap="flat" cmpd="sng" algn="ctr">
                       <a:solidFill>
                         <a:srgbClr val="1E3A52"/>
@@ -5313,7 +5160,7 @@
                     <a:bodyPr/>
                     <a:lstStyle/>
                     <a:p>
-                      <a:pPr indent="0" marL="0">
+                      <a:pPr marL="0" indent="0">
                         <a:buNone/>
                       </a:pPr>
                       <a:r>
@@ -5334,7 +5181,7 @@
                       </a:endParaRPr>
                     </a:p>
                   </a:txBody>
-                  <a:tcPr marL="91440" marR="91440" marT="45720" marB="45720">
+                  <a:tcPr>
                     <a:lnL w="6350" cap="flat" cmpd="sng" algn="ctr">
                       <a:solidFill>
                         <a:srgbClr val="1E3A52"/>
@@ -5381,7 +5228,7 @@
                     <a:bodyPr/>
                     <a:lstStyle/>
                     <a:p>
-                      <a:pPr algn="r" indent="0" marL="0">
+                      <a:pPr marL="0" indent="0" algn="r">
                         <a:buNone/>
                       </a:pPr>
                       <a:r>
@@ -5402,7 +5249,7 @@
                       </a:endParaRPr>
                     </a:p>
                   </a:txBody>
-                  <a:tcPr marL="91440" marR="91440" marT="45720" marB="45720">
+                  <a:tcPr>
                     <a:lnL w="6350" cap="flat" cmpd="sng" algn="ctr">
                       <a:solidFill>
                         <a:srgbClr val="1E3A52"/>
@@ -5444,6 +5291,11 @@
                     </a:solidFill>
                   </a:tcPr>
                 </a:tc>
+                <a:extLst>
+                  <a:ext uri="{0D108BD9-81ED-4DB2-BD59-A6C34878D82A}">
+                    <a16:rowId xmlns:a16="http://schemas.microsoft.com/office/drawing/2014/main" val="10001"/>
+                  </a:ext>
+                </a:extLst>
               </a:tr>
               <a:tr h="356616">
                 <a:tc>
@@ -5451,7 +5303,7 @@
                     <a:bodyPr/>
                     <a:lstStyle/>
                     <a:p>
-                      <a:pPr algn="ctr" indent="0" marL="0">
+                      <a:pPr marL="0" indent="0" algn="ctr">
                         <a:buNone/>
                       </a:pPr>
                       <a:r>
@@ -5472,7 +5324,7 @@
                       </a:endParaRPr>
                     </a:p>
                   </a:txBody>
-                  <a:tcPr marL="91440" marR="91440" marT="45720" marB="45720">
+                  <a:tcPr>
                     <a:lnL w="6350" cap="flat" cmpd="sng" algn="ctr">
                       <a:solidFill>
                         <a:srgbClr val="1E3A52"/>
@@ -5519,7 +5371,7 @@
                     <a:bodyPr/>
                     <a:lstStyle/>
                     <a:p>
-                      <a:pPr indent="0" marL="0">
+                      <a:pPr marL="0" indent="0">
                         <a:buNone/>
                       </a:pPr>
                       <a:r>
@@ -5540,7 +5392,7 @@
                       </a:endParaRPr>
                     </a:p>
                   </a:txBody>
-                  <a:tcPr marL="91440" marR="91440" marT="45720" marB="45720">
+                  <a:tcPr>
                     <a:lnL w="6350" cap="flat" cmpd="sng" algn="ctr">
                       <a:solidFill>
                         <a:srgbClr val="1E3A52"/>
@@ -5587,7 +5439,7 @@
                     <a:bodyPr/>
                     <a:lstStyle/>
                     <a:p>
-                      <a:pPr algn="r" indent="0" marL="0">
+                      <a:pPr marL="0" indent="0" algn="r">
                         <a:buNone/>
                       </a:pPr>
                       <a:r>
@@ -5608,7 +5460,7 @@
                       </a:endParaRPr>
                     </a:p>
                   </a:txBody>
-                  <a:tcPr marL="91440" marR="91440" marT="45720" marB="45720">
+                  <a:tcPr>
                     <a:lnL w="6350" cap="flat" cmpd="sng" algn="ctr">
                       <a:solidFill>
                         <a:srgbClr val="1E3A52"/>
@@ -5650,6 +5502,11 @@
                     </a:solidFill>
                   </a:tcPr>
                 </a:tc>
+                <a:extLst>
+                  <a:ext uri="{0D108BD9-81ED-4DB2-BD59-A6C34878D82A}">
+                    <a16:rowId xmlns:a16="http://schemas.microsoft.com/office/drawing/2014/main" val="10002"/>
+                  </a:ext>
+                </a:extLst>
               </a:tr>
               <a:tr h="356616">
                 <a:tc>
@@ -5657,7 +5514,7 @@
                     <a:bodyPr/>
                     <a:lstStyle/>
                     <a:p>
-                      <a:pPr algn="ctr" indent="0" marL="0">
+                      <a:pPr marL="0" indent="0" algn="ctr">
                         <a:buNone/>
                       </a:pPr>
                       <a:r>
@@ -5678,7 +5535,7 @@
                       </a:endParaRPr>
                     </a:p>
                   </a:txBody>
-                  <a:tcPr marL="91440" marR="91440" marT="45720" marB="45720">
+                  <a:tcPr>
                     <a:lnL w="6350" cap="flat" cmpd="sng" algn="ctr">
                       <a:solidFill>
                         <a:srgbClr val="1E3A52"/>
@@ -5725,7 +5582,7 @@
                     <a:bodyPr/>
                     <a:lstStyle/>
                     <a:p>
-                      <a:pPr indent="0" marL="0">
+                      <a:pPr marL="0" indent="0">
                         <a:buNone/>
                       </a:pPr>
                       <a:r>
@@ -5746,7 +5603,7 @@
                       </a:endParaRPr>
                     </a:p>
                   </a:txBody>
-                  <a:tcPr marL="91440" marR="91440" marT="45720" marB="45720">
+                  <a:tcPr>
                     <a:lnL w="6350" cap="flat" cmpd="sng" algn="ctr">
                       <a:solidFill>
                         <a:srgbClr val="1E3A52"/>
@@ -5793,7 +5650,7 @@
                     <a:bodyPr/>
                     <a:lstStyle/>
                     <a:p>
-                      <a:pPr algn="r" indent="0" marL="0">
+                      <a:pPr marL="0" indent="0" algn="r">
                         <a:buNone/>
                       </a:pPr>
                       <a:r>
@@ -5814,7 +5671,7 @@
                       </a:endParaRPr>
                     </a:p>
                   </a:txBody>
-                  <a:tcPr marL="91440" marR="91440" marT="45720" marB="45720">
+                  <a:tcPr>
                     <a:lnL w="6350" cap="flat" cmpd="sng" algn="ctr">
                       <a:solidFill>
                         <a:srgbClr val="1E3A52"/>
@@ -5856,6 +5713,11 @@
                     </a:solidFill>
                   </a:tcPr>
                 </a:tc>
+                <a:extLst>
+                  <a:ext uri="{0D108BD9-81ED-4DB2-BD59-A6C34878D82A}">
+                    <a16:rowId xmlns:a16="http://schemas.microsoft.com/office/drawing/2014/main" val="10003"/>
+                  </a:ext>
+                </a:extLst>
               </a:tr>
               <a:tr h="356616">
                 <a:tc>
@@ -5863,7 +5725,7 @@
                     <a:bodyPr/>
                     <a:lstStyle/>
                     <a:p>
-                      <a:pPr algn="ctr" indent="0" marL="0">
+                      <a:pPr marL="0" indent="0" algn="ctr">
                         <a:buNone/>
                       </a:pPr>
                       <a:r>
@@ -5884,7 +5746,7 @@
                       </a:endParaRPr>
                     </a:p>
                   </a:txBody>
-                  <a:tcPr marL="91440" marR="91440" marT="45720" marB="45720">
+                  <a:tcPr>
                     <a:lnL w="6350" cap="flat" cmpd="sng" algn="ctr">
                       <a:solidFill>
                         <a:srgbClr val="1E3A52"/>
@@ -5931,7 +5793,7 @@
                     <a:bodyPr/>
                     <a:lstStyle/>
                     <a:p>
-                      <a:pPr indent="0" marL="0">
+                      <a:pPr marL="0" indent="0">
                         <a:buNone/>
                       </a:pPr>
                       <a:r>
@@ -5952,7 +5814,7 @@
                       </a:endParaRPr>
                     </a:p>
                   </a:txBody>
-                  <a:tcPr marL="91440" marR="91440" marT="45720" marB="45720">
+                  <a:tcPr>
                     <a:lnL w="6350" cap="flat" cmpd="sng" algn="ctr">
                       <a:solidFill>
                         <a:srgbClr val="1E3A52"/>
@@ -5999,7 +5861,7 @@
                     <a:bodyPr/>
                     <a:lstStyle/>
                     <a:p>
-                      <a:pPr algn="r" indent="0" marL="0">
+                      <a:pPr marL="0" indent="0" algn="r">
                         <a:buNone/>
                       </a:pPr>
                       <a:r>
@@ -6020,7 +5882,7 @@
                       </a:endParaRPr>
                     </a:p>
                   </a:txBody>
-                  <a:tcPr marL="91440" marR="91440" marT="45720" marB="45720">
+                  <a:tcPr>
                     <a:lnL w="6350" cap="flat" cmpd="sng" algn="ctr">
                       <a:solidFill>
                         <a:srgbClr val="1E3A52"/>
@@ -6062,6 +5924,11 @@
                     </a:solidFill>
                   </a:tcPr>
                 </a:tc>
+                <a:extLst>
+                  <a:ext uri="{0D108BD9-81ED-4DB2-BD59-A6C34878D82A}">
+                    <a16:rowId xmlns:a16="http://schemas.microsoft.com/office/drawing/2014/main" val="10004"/>
+                  </a:ext>
+                </a:extLst>
               </a:tr>
             </a:tbl>
           </a:graphicData>
@@ -6069,7 +5936,7 @@
       </p:graphicFrame>
       <p:sp>
         <p:nvSpPr>
-          <p:cNvPr id="6" name="Text 3"/>
+          <p:cNvPr id="5" name="Text 3"/>
           <p:cNvSpPr/>
           <p:nvPr/>
         </p:nvSpPr>
@@ -6088,7 +5955,7 @@
           <a:bodyPr wrap="square" rtlCol="0" anchor="ctr"/>
           <a:lstStyle/>
           <a:p>
-            <a:pPr algn="l" indent="0" marL="0">
+            <a:pPr marL="0" indent="0" algn="l">
               <a:buNone/>
             </a:pPr>
             <a:r>
@@ -6126,9 +5993,27 @@
             <a:tbl>
               <a:tblPr/>
               <a:tblGrid>
-                <a:gridCol w="365760"/>
-                <a:gridCol w="2743200"/>
-                <a:gridCol w="1005840"/>
+                <a:gridCol w="365760">
+                  <a:extLst>
+                    <a:ext uri="{9D8B030D-6E8A-4147-A177-3AD203B41FA5}">
+                      <a16:colId xmlns:a16="http://schemas.microsoft.com/office/drawing/2014/main" val="20000"/>
+                    </a:ext>
+                  </a:extLst>
+                </a:gridCol>
+                <a:gridCol w="2743200">
+                  <a:extLst>
+                    <a:ext uri="{9D8B030D-6E8A-4147-A177-3AD203B41FA5}">
+                      <a16:colId xmlns:a16="http://schemas.microsoft.com/office/drawing/2014/main" val="20001"/>
+                    </a:ext>
+                  </a:extLst>
+                </a:gridCol>
+                <a:gridCol w="1005840">
+                  <a:extLst>
+                    <a:ext uri="{9D8B030D-6E8A-4147-A177-3AD203B41FA5}">
+                      <a16:colId xmlns:a16="http://schemas.microsoft.com/office/drawing/2014/main" val="20002"/>
+                    </a:ext>
+                  </a:extLst>
+                </a:gridCol>
               </a:tblGrid>
               <a:tr h="356616">
                 <a:tc>
@@ -6136,7 +6021,7 @@
                     <a:bodyPr/>
                     <a:lstStyle/>
                     <a:p>
-                      <a:pPr algn="ctr" indent="0" marL="0">
+                      <a:pPr marL="0" indent="0" algn="ctr">
                         <a:buNone/>
                       </a:pPr>
                       <a:r>
@@ -6157,7 +6042,7 @@
                       </a:endParaRPr>
                     </a:p>
                   </a:txBody>
-                  <a:tcPr marL="91440" marR="91440" marT="45720" marB="45720">
+                  <a:tcPr>
                     <a:lnL w="6350" cap="flat" cmpd="sng" algn="ctr">
                       <a:solidFill>
                         <a:srgbClr val="1E3A52"/>
@@ -6204,7 +6089,7 @@
                     <a:bodyPr/>
                     <a:lstStyle/>
                     <a:p>
-                      <a:pPr indent="0" marL="0">
+                      <a:pPr marL="0" indent="0">
                         <a:buNone/>
                       </a:pPr>
                       <a:r>
@@ -6225,7 +6110,7 @@
                       </a:endParaRPr>
                     </a:p>
                   </a:txBody>
-                  <a:tcPr marL="91440" marR="91440" marT="45720" marB="45720">
+                  <a:tcPr>
                     <a:lnL w="6350" cap="flat" cmpd="sng" algn="ctr">
                       <a:solidFill>
                         <a:srgbClr val="1E3A52"/>
@@ -6272,7 +6157,7 @@
                     <a:bodyPr/>
                     <a:lstStyle/>
                     <a:p>
-                      <a:pPr algn="ctr" indent="0" marL="0">
+                      <a:pPr marL="0" indent="0" algn="ctr">
                         <a:buNone/>
                       </a:pPr>
                       <a:r>
@@ -6293,7 +6178,7 @@
                       </a:endParaRPr>
                     </a:p>
                   </a:txBody>
-                  <a:tcPr marL="91440" marR="91440" marT="45720" marB="45720">
+                  <a:tcPr>
                     <a:lnL w="6350" cap="flat" cmpd="sng" algn="ctr">
                       <a:solidFill>
                         <a:srgbClr val="1E3A52"/>
@@ -6335,6 +6220,11 @@
                     </a:solidFill>
                   </a:tcPr>
                 </a:tc>
+                <a:extLst>
+                  <a:ext uri="{0D108BD9-81ED-4DB2-BD59-A6C34878D82A}">
+                    <a16:rowId xmlns:a16="http://schemas.microsoft.com/office/drawing/2014/main" val="10000"/>
+                  </a:ext>
+                </a:extLst>
               </a:tr>
               <a:tr h="356616">
                 <a:tc>
@@ -6342,7 +6232,7 @@
                     <a:bodyPr/>
                     <a:lstStyle/>
                     <a:p>
-                      <a:pPr algn="ctr" indent="0" marL="0">
+                      <a:pPr marL="0" indent="0" algn="ctr">
                         <a:buNone/>
                       </a:pPr>
                       <a:r>
@@ -6363,7 +6253,7 @@
                       </a:endParaRPr>
                     </a:p>
                   </a:txBody>
-                  <a:tcPr marL="91440" marR="91440" marT="45720" marB="45720">
+                  <a:tcPr>
                     <a:lnL w="6350" cap="flat" cmpd="sng" algn="ctr">
                       <a:solidFill>
                         <a:srgbClr val="1E3A52"/>
@@ -6410,7 +6300,7 @@
                     <a:bodyPr/>
                     <a:lstStyle/>
                     <a:p>
-                      <a:pPr indent="0" marL="0">
+                      <a:pPr marL="0" indent="0">
                         <a:buNone/>
                       </a:pPr>
                       <a:r>
@@ -6431,7 +6321,7 @@
                       </a:endParaRPr>
                     </a:p>
                   </a:txBody>
-                  <a:tcPr marL="91440" marR="91440" marT="45720" marB="45720">
+                  <a:tcPr>
                     <a:lnL w="6350" cap="flat" cmpd="sng" algn="ctr">
                       <a:solidFill>
                         <a:srgbClr val="1E3A52"/>
@@ -6478,7 +6368,7 @@
                     <a:bodyPr/>
                     <a:lstStyle/>
                     <a:p>
-                      <a:pPr algn="ctr" indent="0" marL="0">
+                      <a:pPr marL="0" indent="0" algn="ctr">
                         <a:buNone/>
                       </a:pPr>
                       <a:r>
@@ -6499,7 +6389,7 @@
                       </a:endParaRPr>
                     </a:p>
                   </a:txBody>
-                  <a:tcPr marL="91440" marR="91440" marT="45720" marB="45720">
+                  <a:tcPr>
                     <a:lnL w="6350" cap="flat" cmpd="sng" algn="ctr">
                       <a:solidFill>
                         <a:srgbClr val="1E3A52"/>
@@ -6541,6 +6431,11 @@
                     </a:solidFill>
                   </a:tcPr>
                 </a:tc>
+                <a:extLst>
+                  <a:ext uri="{0D108BD9-81ED-4DB2-BD59-A6C34878D82A}">
+                    <a16:rowId xmlns:a16="http://schemas.microsoft.com/office/drawing/2014/main" val="10001"/>
+                  </a:ext>
+                </a:extLst>
               </a:tr>
               <a:tr h="356616">
                 <a:tc>
@@ -6548,7 +6443,7 @@
                     <a:bodyPr/>
                     <a:lstStyle/>
                     <a:p>
-                      <a:pPr algn="ctr" indent="0" marL="0">
+                      <a:pPr marL="0" indent="0" algn="ctr">
                         <a:buNone/>
                       </a:pPr>
                       <a:r>
@@ -6569,7 +6464,7 @@
                       </a:endParaRPr>
                     </a:p>
                   </a:txBody>
-                  <a:tcPr marL="91440" marR="91440" marT="45720" marB="45720">
+                  <a:tcPr>
                     <a:lnL w="6350" cap="flat" cmpd="sng" algn="ctr">
                       <a:solidFill>
                         <a:srgbClr val="1E3A52"/>
@@ -6616,7 +6511,7 @@
                     <a:bodyPr/>
                     <a:lstStyle/>
                     <a:p>
-                      <a:pPr indent="0" marL="0">
+                      <a:pPr marL="0" indent="0">
                         <a:buNone/>
                       </a:pPr>
                       <a:r>
@@ -6637,7 +6532,7 @@
                       </a:endParaRPr>
                     </a:p>
                   </a:txBody>
-                  <a:tcPr marL="91440" marR="91440" marT="45720" marB="45720">
+                  <a:tcPr>
                     <a:lnL w="6350" cap="flat" cmpd="sng" algn="ctr">
                       <a:solidFill>
                         <a:srgbClr val="1E3A52"/>
@@ -6684,7 +6579,7 @@
                     <a:bodyPr/>
                     <a:lstStyle/>
                     <a:p>
-                      <a:pPr algn="ctr" indent="0" marL="0">
+                      <a:pPr marL="0" indent="0" algn="ctr">
                         <a:buNone/>
                       </a:pPr>
                       <a:r>
@@ -6705,7 +6600,7 @@
                       </a:endParaRPr>
                     </a:p>
                   </a:txBody>
-                  <a:tcPr marL="91440" marR="91440" marT="45720" marB="45720">
+                  <a:tcPr>
                     <a:lnL w="6350" cap="flat" cmpd="sng" algn="ctr">
                       <a:solidFill>
                         <a:srgbClr val="1E3A52"/>
@@ -6747,6 +6642,11 @@
                     </a:solidFill>
                   </a:tcPr>
                 </a:tc>
+                <a:extLst>
+                  <a:ext uri="{0D108BD9-81ED-4DB2-BD59-A6C34878D82A}">
+                    <a16:rowId xmlns:a16="http://schemas.microsoft.com/office/drawing/2014/main" val="10002"/>
+                  </a:ext>
+                </a:extLst>
               </a:tr>
               <a:tr h="356616">
                 <a:tc>
@@ -6754,7 +6654,7 @@
                     <a:bodyPr/>
                     <a:lstStyle/>
                     <a:p>
-                      <a:pPr algn="ctr" indent="0" marL="0">
+                      <a:pPr marL="0" indent="0" algn="ctr">
                         <a:buNone/>
                       </a:pPr>
                       <a:r>
@@ -6775,7 +6675,7 @@
                       </a:endParaRPr>
                     </a:p>
                   </a:txBody>
-                  <a:tcPr marL="91440" marR="91440" marT="45720" marB="45720">
+                  <a:tcPr>
                     <a:lnL w="6350" cap="flat" cmpd="sng" algn="ctr">
                       <a:solidFill>
                         <a:srgbClr val="1E3A52"/>
@@ -6822,7 +6722,7 @@
                     <a:bodyPr/>
                     <a:lstStyle/>
                     <a:p>
-                      <a:pPr indent="0" marL="0">
+                      <a:pPr marL="0" indent="0">
                         <a:buNone/>
                       </a:pPr>
                       <a:r>
@@ -6843,7 +6743,7 @@
                       </a:endParaRPr>
                     </a:p>
                   </a:txBody>
-                  <a:tcPr marL="91440" marR="91440" marT="45720" marB="45720">
+                  <a:tcPr>
                     <a:lnL w="6350" cap="flat" cmpd="sng" algn="ctr">
                       <a:solidFill>
                         <a:srgbClr val="1E3A52"/>
@@ -6890,7 +6790,7 @@
                     <a:bodyPr/>
                     <a:lstStyle/>
                     <a:p>
-                      <a:pPr algn="ctr" indent="0" marL="0">
+                      <a:pPr marL="0" indent="0" algn="ctr">
                         <a:buNone/>
                       </a:pPr>
                       <a:r>
@@ -6911,7 +6811,7 @@
                       </a:endParaRPr>
                     </a:p>
                   </a:txBody>
-                  <a:tcPr marL="91440" marR="91440" marT="45720" marB="45720">
+                  <a:tcPr>
                     <a:lnL w="6350" cap="flat" cmpd="sng" algn="ctr">
                       <a:solidFill>
                         <a:srgbClr val="1E3A52"/>
@@ -6953,6 +6853,11 @@
                     </a:solidFill>
                   </a:tcPr>
                 </a:tc>
+                <a:extLst>
+                  <a:ext uri="{0D108BD9-81ED-4DB2-BD59-A6C34878D82A}">
+                    <a16:rowId xmlns:a16="http://schemas.microsoft.com/office/drawing/2014/main" val="10003"/>
+                  </a:ext>
+                </a:extLst>
               </a:tr>
               <a:tr h="356616">
                 <a:tc>
@@ -6960,7 +6865,7 @@
                     <a:bodyPr/>
                     <a:lstStyle/>
                     <a:p>
-                      <a:pPr algn="ctr" indent="0" marL="0">
+                      <a:pPr marL="0" indent="0" algn="ctr">
                         <a:buNone/>
                       </a:pPr>
                       <a:r>
@@ -6981,7 +6886,7 @@
                       </a:endParaRPr>
                     </a:p>
                   </a:txBody>
-                  <a:tcPr marL="91440" marR="91440" marT="45720" marB="45720">
+                  <a:tcPr>
                     <a:lnL w="6350" cap="flat" cmpd="sng" algn="ctr">
                       <a:solidFill>
                         <a:srgbClr val="1E3A52"/>
@@ -7028,7 +6933,7 @@
                     <a:bodyPr/>
                     <a:lstStyle/>
                     <a:p>
-                      <a:pPr indent="0" marL="0">
+                      <a:pPr marL="0" indent="0">
                         <a:buNone/>
                       </a:pPr>
                       <a:r>
@@ -7049,7 +6954,7 @@
                       </a:endParaRPr>
                     </a:p>
                   </a:txBody>
-                  <a:tcPr marL="91440" marR="91440" marT="45720" marB="45720">
+                  <a:tcPr>
                     <a:lnL w="6350" cap="flat" cmpd="sng" algn="ctr">
                       <a:solidFill>
                         <a:srgbClr val="1E3A52"/>
@@ -7096,7 +7001,7 @@
                     <a:bodyPr/>
                     <a:lstStyle/>
                     <a:p>
-                      <a:pPr algn="ctr" indent="0" marL="0">
+                      <a:pPr marL="0" indent="0" algn="ctr">
                         <a:buNone/>
                       </a:pPr>
                       <a:r>
@@ -7117,7 +7022,7 @@
                       </a:endParaRPr>
                     </a:p>
                   </a:txBody>
-                  <a:tcPr marL="91440" marR="91440" marT="45720" marB="45720">
+                  <a:tcPr>
                     <a:lnL w="6350" cap="flat" cmpd="sng" algn="ctr">
                       <a:solidFill>
                         <a:srgbClr val="1E3A52"/>
@@ -7159,6 +7064,11 @@
                     </a:solidFill>
                   </a:tcPr>
                 </a:tc>
+                <a:extLst>
+                  <a:ext uri="{0D108BD9-81ED-4DB2-BD59-A6C34878D82A}">
+                    <a16:rowId xmlns:a16="http://schemas.microsoft.com/office/drawing/2014/main" val="10004"/>
+                  </a:ext>
+                </a:extLst>
               </a:tr>
             </a:tbl>
           </a:graphicData>
@@ -7212,7 +7122,7 @@
           <a:bodyPr wrap="square" rtlCol="0" anchor="ctr"/>
           <a:lstStyle/>
           <a:p>
-            <a:pPr algn="l" indent="0" marL="0">
+            <a:pPr marL="0" indent="0" algn="l">
               <a:buNone/>
             </a:pPr>
             <a:r>
@@ -7248,7 +7158,7 @@
           <a:bodyPr wrap="square" rtlCol="0" anchor="t"/>
           <a:lstStyle/>
           <a:p>
-            <a:pPr indent="0" marL="0">
+            <a:pPr marL="0" indent="0">
               <a:buNone/>
             </a:pPr>
             <a:r>
@@ -7259,9 +7169,6 @@
               </a:rPr>
               <a:t>①  </a:t>
             </a:r>
-            <a:pPr indent="0" marL="0">
-              <a:buNone/>
-            </a:pPr>
             <a:r>
               <a:rPr lang="en-US" sz="950" dirty="0">
                 <a:solidFill>
@@ -7271,9 +7178,6 @@
               <a:t>Paralelismo real: speedup de 5.63× com 12 workers demonstra ganho concreto em grandes volumes de dados.
 </a:t>
             </a:r>
-            <a:pPr indent="0" marL="0">
-              <a:buNone/>
-            </a:pPr>
             <a:r>
               <a:rPr lang="en-US" sz="950" b="1" dirty="0">
                 <a:solidFill>
@@ -7282,9 +7186,6 @@
               </a:rPr>
               <a:t>②  </a:t>
             </a:r>
-            <a:pPr indent="0" marL="0">
-              <a:buNone/>
-            </a:pPr>
             <a:r>
               <a:rPr lang="en-US" sz="950" dirty="0">
                 <a:solidFill>
@@ -7294,9 +7195,6 @@
               <a:t>Eficiência decrescente: cai de 100% (serial) para 47% (12 workers) — cada worker adicionado gera overhead proporcional.
 </a:t>
             </a:r>
-            <a:pPr indent="0" marL="0">
-              <a:buNone/>
-            </a:pPr>
             <a:r>
               <a:rPr lang="en-US" sz="950" b="1" dirty="0">
                 <a:solidFill>
@@ -7305,9 +7203,6 @@
               </a:rPr>
               <a:t>③  </a:t>
             </a:r>
-            <a:pPr indent="0" marL="0">
-              <a:buNone/>
-            </a:pPr>
             <a:r>
               <a:rPr lang="en-US" sz="950" dirty="0">
                 <a:solidFill>
@@ -7336,6 +7231,7 @@
         <a:solidFill>
           <a:srgbClr val="EDF6F9"/>
         </a:solidFill>
+        <a:effectLst/>
       </p:bgPr>
     </p:bg>
     <p:spTree>
@@ -7398,7 +7294,7 @@
           <a:bodyPr wrap="square" lIns="0" tIns="0" rIns="0" bIns="0" rtlCol="0" anchor="ctr"/>
           <a:lstStyle/>
           <a:p>
-            <a:pPr algn="l" indent="0" marL="0">
+            <a:pPr marL="0" indent="0" algn="l">
               <a:buNone/>
             </a:pPr>
             <a:r>
@@ -7437,7 +7333,7 @@
           <a:bodyPr wrap="square" rtlCol="0" anchor="ctr"/>
           <a:lstStyle/>
           <a:p>
-            <a:pPr algn="l" indent="0" marL="0">
+            <a:pPr marL="0" indent="0" algn="l">
               <a:buNone/>
             </a:pPr>
             <a:r>
@@ -7475,9 +7371,27 @@
             <a:tbl>
               <a:tblPr/>
               <a:tblGrid>
-                <a:gridCol w="384048"/>
-                <a:gridCol w="2743200"/>
-                <a:gridCol w="1033272"/>
+                <a:gridCol w="384048">
+                  <a:extLst>
+                    <a:ext uri="{9D8B030D-6E8A-4147-A177-3AD203B41FA5}">
+                      <a16:colId xmlns:a16="http://schemas.microsoft.com/office/drawing/2014/main" val="20000"/>
+                    </a:ext>
+                  </a:extLst>
+                </a:gridCol>
+                <a:gridCol w="2743200">
+                  <a:extLst>
+                    <a:ext uri="{9D8B030D-6E8A-4147-A177-3AD203B41FA5}">
+                      <a16:colId xmlns:a16="http://schemas.microsoft.com/office/drawing/2014/main" val="20001"/>
+                    </a:ext>
+                  </a:extLst>
+                </a:gridCol>
+                <a:gridCol w="1033272">
+                  <a:extLst>
+                    <a:ext uri="{9D8B030D-6E8A-4147-A177-3AD203B41FA5}">
+                      <a16:colId xmlns:a16="http://schemas.microsoft.com/office/drawing/2014/main" val="20002"/>
+                    </a:ext>
+                  </a:extLst>
+                </a:gridCol>
               </a:tblGrid>
               <a:tr h="356616">
                 <a:tc>
@@ -7485,7 +7399,7 @@
                     <a:bodyPr/>
                     <a:lstStyle/>
                     <a:p>
-                      <a:pPr algn="ctr" indent="0" marL="0">
+                      <a:pPr marL="0" indent="0" algn="ctr">
                         <a:buNone/>
                       </a:pPr>
                       <a:r>
@@ -7506,7 +7420,7 @@
                       </a:endParaRPr>
                     </a:p>
                   </a:txBody>
-                  <a:tcPr marL="91440" marR="91440" marT="45720" marB="45720">
+                  <a:tcPr>
                     <a:lnL w="6350" cap="flat" cmpd="sng" algn="ctr">
                       <a:solidFill>
                         <a:srgbClr val="D0E8EF"/>
@@ -7553,7 +7467,7 @@
                     <a:bodyPr/>
                     <a:lstStyle/>
                     <a:p>
-                      <a:pPr indent="0" marL="0">
+                      <a:pPr marL="0" indent="0">
                         <a:buNone/>
                       </a:pPr>
                       <a:r>
@@ -7574,7 +7488,7 @@
                       </a:endParaRPr>
                     </a:p>
                   </a:txBody>
-                  <a:tcPr marL="91440" marR="91440" marT="45720" marB="45720">
+                  <a:tcPr>
                     <a:lnL w="6350" cap="flat" cmpd="sng" algn="ctr">
                       <a:solidFill>
                         <a:srgbClr val="D0E8EF"/>
@@ -7621,7 +7535,7 @@
                     <a:bodyPr/>
                     <a:lstStyle/>
                     <a:p>
-                      <a:pPr algn="r" indent="0" marL="0">
+                      <a:pPr marL="0" indent="0" algn="r">
                         <a:buNone/>
                       </a:pPr>
                       <a:r>
@@ -7642,7 +7556,7 @@
                       </a:endParaRPr>
                     </a:p>
                   </a:txBody>
-                  <a:tcPr marL="91440" marR="91440" marT="45720" marB="45720">
+                  <a:tcPr>
                     <a:lnL w="6350" cap="flat" cmpd="sng" algn="ctr">
                       <a:solidFill>
                         <a:srgbClr val="D0E8EF"/>
@@ -7684,6 +7598,11 @@
                     </a:solidFill>
                   </a:tcPr>
                 </a:tc>
+                <a:extLst>
+                  <a:ext uri="{0D108BD9-81ED-4DB2-BD59-A6C34878D82A}">
+                    <a16:rowId xmlns:a16="http://schemas.microsoft.com/office/drawing/2014/main" val="10000"/>
+                  </a:ext>
+                </a:extLst>
               </a:tr>
               <a:tr h="356616">
                 <a:tc>
@@ -7691,7 +7610,7 @@
                     <a:bodyPr/>
                     <a:lstStyle/>
                     <a:p>
-                      <a:pPr algn="ctr" indent="0" marL="0">
+                      <a:pPr marL="0" indent="0" algn="ctr">
                         <a:buNone/>
                       </a:pPr>
                       <a:r>
@@ -7712,7 +7631,7 @@
                       </a:endParaRPr>
                     </a:p>
                   </a:txBody>
-                  <a:tcPr marL="91440" marR="91440" marT="45720" marB="45720">
+                  <a:tcPr>
                     <a:lnL w="6350" cap="flat" cmpd="sng" algn="ctr">
                       <a:solidFill>
                         <a:srgbClr val="D0E8EF"/>
@@ -7759,7 +7678,7 @@
                     <a:bodyPr/>
                     <a:lstStyle/>
                     <a:p>
-                      <a:pPr indent="0" marL="0">
+                      <a:pPr marL="0" indent="0">
                         <a:buNone/>
                       </a:pPr>
                       <a:r>
@@ -7780,7 +7699,7 @@
                       </a:endParaRPr>
                     </a:p>
                   </a:txBody>
-                  <a:tcPr marL="91440" marR="91440" marT="45720" marB="45720">
+                  <a:tcPr>
                     <a:lnL w="6350" cap="flat" cmpd="sng" algn="ctr">
                       <a:solidFill>
                         <a:srgbClr val="D0E8EF"/>
@@ -7827,7 +7746,7 @@
                     <a:bodyPr/>
                     <a:lstStyle/>
                     <a:p>
-                      <a:pPr algn="r" indent="0" marL="0">
+                      <a:pPr marL="0" indent="0" algn="r">
                         <a:buNone/>
                       </a:pPr>
                       <a:r>
@@ -7848,7 +7767,7 @@
                       </a:endParaRPr>
                     </a:p>
                   </a:txBody>
-                  <a:tcPr marL="91440" marR="91440" marT="45720" marB="45720">
+                  <a:tcPr>
                     <a:lnL w="6350" cap="flat" cmpd="sng" algn="ctr">
                       <a:solidFill>
                         <a:srgbClr val="D0E8EF"/>
@@ -7890,6 +7809,11 @@
                     </a:solidFill>
                   </a:tcPr>
                 </a:tc>
+                <a:extLst>
+                  <a:ext uri="{0D108BD9-81ED-4DB2-BD59-A6C34878D82A}">
+                    <a16:rowId xmlns:a16="http://schemas.microsoft.com/office/drawing/2014/main" val="10001"/>
+                  </a:ext>
+                </a:extLst>
               </a:tr>
               <a:tr h="356616">
                 <a:tc>
@@ -7897,7 +7821,7 @@
                     <a:bodyPr/>
                     <a:lstStyle/>
                     <a:p>
-                      <a:pPr algn="ctr" indent="0" marL="0">
+                      <a:pPr marL="0" indent="0" algn="ctr">
                         <a:buNone/>
                       </a:pPr>
                       <a:r>
@@ -7918,7 +7842,7 @@
                       </a:endParaRPr>
                     </a:p>
                   </a:txBody>
-                  <a:tcPr marL="91440" marR="91440" marT="45720" marB="45720">
+                  <a:tcPr>
                     <a:lnL w="6350" cap="flat" cmpd="sng" algn="ctr">
                       <a:solidFill>
                         <a:srgbClr val="D0E8EF"/>
@@ -7965,7 +7889,7 @@
                     <a:bodyPr/>
                     <a:lstStyle/>
                     <a:p>
-                      <a:pPr indent="0" marL="0">
+                      <a:pPr marL="0" indent="0">
                         <a:buNone/>
                       </a:pPr>
                       <a:r>
@@ -7986,7 +7910,7 @@
                       </a:endParaRPr>
                     </a:p>
                   </a:txBody>
-                  <a:tcPr marL="91440" marR="91440" marT="45720" marB="45720">
+                  <a:tcPr>
                     <a:lnL w="6350" cap="flat" cmpd="sng" algn="ctr">
                       <a:solidFill>
                         <a:srgbClr val="D0E8EF"/>
@@ -8033,7 +7957,7 @@
                     <a:bodyPr/>
                     <a:lstStyle/>
                     <a:p>
-                      <a:pPr algn="r" indent="0" marL="0">
+                      <a:pPr marL="0" indent="0" algn="r">
                         <a:buNone/>
                       </a:pPr>
                       <a:r>
@@ -8054,7 +7978,7 @@
                       </a:endParaRPr>
                     </a:p>
                   </a:txBody>
-                  <a:tcPr marL="91440" marR="91440" marT="45720" marB="45720">
+                  <a:tcPr>
                     <a:lnL w="6350" cap="flat" cmpd="sng" algn="ctr">
                       <a:solidFill>
                         <a:srgbClr val="D0E8EF"/>
@@ -8096,6 +8020,11 @@
                     </a:solidFill>
                   </a:tcPr>
                 </a:tc>
+                <a:extLst>
+                  <a:ext uri="{0D108BD9-81ED-4DB2-BD59-A6C34878D82A}">
+                    <a16:rowId xmlns:a16="http://schemas.microsoft.com/office/drawing/2014/main" val="10002"/>
+                  </a:ext>
+                </a:extLst>
               </a:tr>
               <a:tr h="356616">
                 <a:tc>
@@ -8103,7 +8032,7 @@
                     <a:bodyPr/>
                     <a:lstStyle/>
                     <a:p>
-                      <a:pPr algn="ctr" indent="0" marL="0">
+                      <a:pPr marL="0" indent="0" algn="ctr">
                         <a:buNone/>
                       </a:pPr>
                       <a:r>
@@ -8124,7 +8053,7 @@
                       </a:endParaRPr>
                     </a:p>
                   </a:txBody>
-                  <a:tcPr marL="91440" marR="91440" marT="45720" marB="45720">
+                  <a:tcPr>
                     <a:lnL w="6350" cap="flat" cmpd="sng" algn="ctr">
                       <a:solidFill>
                         <a:srgbClr val="D0E8EF"/>
@@ -8171,7 +8100,7 @@
                     <a:bodyPr/>
                     <a:lstStyle/>
                     <a:p>
-                      <a:pPr indent="0" marL="0">
+                      <a:pPr marL="0" indent="0">
                         <a:buNone/>
                       </a:pPr>
                       <a:r>
@@ -8192,7 +8121,7 @@
                       </a:endParaRPr>
                     </a:p>
                   </a:txBody>
-                  <a:tcPr marL="91440" marR="91440" marT="45720" marB="45720">
+                  <a:tcPr>
                     <a:lnL w="6350" cap="flat" cmpd="sng" algn="ctr">
                       <a:solidFill>
                         <a:srgbClr val="D0E8EF"/>
@@ -8239,7 +8168,7 @@
                     <a:bodyPr/>
                     <a:lstStyle/>
                     <a:p>
-                      <a:pPr algn="r" indent="0" marL="0">
+                      <a:pPr marL="0" indent="0" algn="r">
                         <a:buNone/>
                       </a:pPr>
                       <a:r>
@@ -8260,7 +8189,7 @@
                       </a:endParaRPr>
                     </a:p>
                   </a:txBody>
-                  <a:tcPr marL="91440" marR="91440" marT="45720" marB="45720">
+                  <a:tcPr>
                     <a:lnL w="6350" cap="flat" cmpd="sng" algn="ctr">
                       <a:solidFill>
                         <a:srgbClr val="D0E8EF"/>
@@ -8302,6 +8231,11 @@
                     </a:solidFill>
                   </a:tcPr>
                 </a:tc>
+                <a:extLst>
+                  <a:ext uri="{0D108BD9-81ED-4DB2-BD59-A6C34878D82A}">
+                    <a16:rowId xmlns:a16="http://schemas.microsoft.com/office/drawing/2014/main" val="10003"/>
+                  </a:ext>
+                </a:extLst>
               </a:tr>
               <a:tr h="356616">
                 <a:tc>
@@ -8309,7 +8243,7 @@
                     <a:bodyPr/>
                     <a:lstStyle/>
                     <a:p>
-                      <a:pPr algn="ctr" indent="0" marL="0">
+                      <a:pPr marL="0" indent="0" algn="ctr">
                         <a:buNone/>
                       </a:pPr>
                       <a:r>
@@ -8330,7 +8264,7 @@
                       </a:endParaRPr>
                     </a:p>
                   </a:txBody>
-                  <a:tcPr marL="91440" marR="91440" marT="45720" marB="45720">
+                  <a:tcPr>
                     <a:lnL w="6350" cap="flat" cmpd="sng" algn="ctr">
                       <a:solidFill>
                         <a:srgbClr val="D0E8EF"/>
@@ -8377,7 +8311,7 @@
                     <a:bodyPr/>
                     <a:lstStyle/>
                     <a:p>
-                      <a:pPr indent="0" marL="0">
+                      <a:pPr marL="0" indent="0">
                         <a:buNone/>
                       </a:pPr>
                       <a:r>
@@ -8398,7 +8332,7 @@
                       </a:endParaRPr>
                     </a:p>
                   </a:txBody>
-                  <a:tcPr marL="91440" marR="91440" marT="45720" marB="45720">
+                  <a:tcPr>
                     <a:lnL w="6350" cap="flat" cmpd="sng" algn="ctr">
                       <a:solidFill>
                         <a:srgbClr val="D0E8EF"/>
@@ -8445,7 +8379,7 @@
                     <a:bodyPr/>
                     <a:lstStyle/>
                     <a:p>
-                      <a:pPr algn="r" indent="0" marL="0">
+                      <a:pPr marL="0" indent="0" algn="r">
                         <a:buNone/>
                       </a:pPr>
                       <a:r>
@@ -8466,7 +8400,7 @@
                       </a:endParaRPr>
                     </a:p>
                   </a:txBody>
-                  <a:tcPr marL="91440" marR="91440" marT="45720" marB="45720">
+                  <a:tcPr>
                     <a:lnL w="6350" cap="flat" cmpd="sng" algn="ctr">
                       <a:solidFill>
                         <a:srgbClr val="D0E8EF"/>
@@ -8508,6 +8442,11 @@
                     </a:solidFill>
                   </a:tcPr>
                 </a:tc>
+                <a:extLst>
+                  <a:ext uri="{0D108BD9-81ED-4DB2-BD59-A6C34878D82A}">
+                    <a16:rowId xmlns:a16="http://schemas.microsoft.com/office/drawing/2014/main" val="10004"/>
+                  </a:ext>
+                </a:extLst>
               </a:tr>
               <a:tr h="356616">
                 <a:tc>
@@ -8515,7 +8454,7 @@
                     <a:bodyPr/>
                     <a:lstStyle/>
                     <a:p>
-                      <a:pPr algn="ctr" indent="0" marL="0">
+                      <a:pPr marL="0" indent="0" algn="ctr">
                         <a:buNone/>
                       </a:pPr>
                       <a:r>
@@ -8536,7 +8475,7 @@
                       </a:endParaRPr>
                     </a:p>
                   </a:txBody>
-                  <a:tcPr marL="91440" marR="91440" marT="45720" marB="45720">
+                  <a:tcPr>
                     <a:lnL w="6350" cap="flat" cmpd="sng" algn="ctr">
                       <a:solidFill>
                         <a:srgbClr val="D0E8EF"/>
@@ -8583,7 +8522,7 @@
                     <a:bodyPr/>
                     <a:lstStyle/>
                     <a:p>
-                      <a:pPr indent="0" marL="0">
+                      <a:pPr marL="0" indent="0">
                         <a:buNone/>
                       </a:pPr>
                       <a:r>
@@ -8604,7 +8543,7 @@
                       </a:endParaRPr>
                     </a:p>
                   </a:txBody>
-                  <a:tcPr marL="91440" marR="91440" marT="45720" marB="45720">
+                  <a:tcPr>
                     <a:lnL w="6350" cap="flat" cmpd="sng" algn="ctr">
                       <a:solidFill>
                         <a:srgbClr val="D0E8EF"/>
@@ -8651,7 +8590,7 @@
                     <a:bodyPr/>
                     <a:lstStyle/>
                     <a:p>
-                      <a:pPr algn="r" indent="0" marL="0">
+                      <a:pPr marL="0" indent="0" algn="r">
                         <a:buNone/>
                       </a:pPr>
                       <a:r>
@@ -8672,7 +8611,7 @@
                       </a:endParaRPr>
                     </a:p>
                   </a:txBody>
-                  <a:tcPr marL="91440" marR="91440" marT="45720" marB="45720">
+                  <a:tcPr>
                     <a:lnL w="6350" cap="flat" cmpd="sng" algn="ctr">
                       <a:solidFill>
                         <a:srgbClr val="D0E8EF"/>
@@ -8714,6 +8653,11 @@
                     </a:solidFill>
                   </a:tcPr>
                 </a:tc>
+                <a:extLst>
+                  <a:ext uri="{0D108BD9-81ED-4DB2-BD59-A6C34878D82A}">
+                    <a16:rowId xmlns:a16="http://schemas.microsoft.com/office/drawing/2014/main" val="10005"/>
+                  </a:ext>
+                </a:extLst>
               </a:tr>
               <a:tr h="356616">
                 <a:tc>
@@ -8721,7 +8665,7 @@
                     <a:bodyPr/>
                     <a:lstStyle/>
                     <a:p>
-                      <a:pPr algn="ctr" indent="0" marL="0">
+                      <a:pPr marL="0" indent="0" algn="ctr">
                         <a:buNone/>
                       </a:pPr>
                       <a:r>
@@ -8742,7 +8686,7 @@
                       </a:endParaRPr>
                     </a:p>
                   </a:txBody>
-                  <a:tcPr marL="91440" marR="91440" marT="45720" marB="45720">
+                  <a:tcPr>
                     <a:lnL w="6350" cap="flat" cmpd="sng" algn="ctr">
                       <a:solidFill>
                         <a:srgbClr val="D0E8EF"/>
@@ -8789,7 +8733,7 @@
                     <a:bodyPr/>
                     <a:lstStyle/>
                     <a:p>
-                      <a:pPr indent="0" marL="0">
+                      <a:pPr marL="0" indent="0">
                         <a:buNone/>
                       </a:pPr>
                       <a:r>
@@ -8810,7 +8754,7 @@
                       </a:endParaRPr>
                     </a:p>
                   </a:txBody>
-                  <a:tcPr marL="91440" marR="91440" marT="45720" marB="45720">
+                  <a:tcPr>
                     <a:lnL w="6350" cap="flat" cmpd="sng" algn="ctr">
                       <a:solidFill>
                         <a:srgbClr val="D0E8EF"/>
@@ -8857,7 +8801,7 @@
                     <a:bodyPr/>
                     <a:lstStyle/>
                     <a:p>
-                      <a:pPr algn="r" indent="0" marL="0">
+                      <a:pPr marL="0" indent="0" algn="r">
                         <a:buNone/>
                       </a:pPr>
                       <a:r>
@@ -8878,7 +8822,7 @@
                       </a:endParaRPr>
                     </a:p>
                   </a:txBody>
-                  <a:tcPr marL="91440" marR="91440" marT="45720" marB="45720">
+                  <a:tcPr>
                     <a:lnL w="6350" cap="flat" cmpd="sng" algn="ctr">
                       <a:solidFill>
                         <a:srgbClr val="D0E8EF"/>
@@ -8920,6 +8864,11 @@
                     </a:solidFill>
                   </a:tcPr>
                 </a:tc>
+                <a:extLst>
+                  <a:ext uri="{0D108BD9-81ED-4DB2-BD59-A6C34878D82A}">
+                    <a16:rowId xmlns:a16="http://schemas.microsoft.com/office/drawing/2014/main" val="10006"/>
+                  </a:ext>
+                </a:extLst>
               </a:tr>
               <a:tr h="356616">
                 <a:tc>
@@ -8927,7 +8876,7 @@
                     <a:bodyPr/>
                     <a:lstStyle/>
                     <a:p>
-                      <a:pPr algn="ctr" indent="0" marL="0">
+                      <a:pPr marL="0" indent="0" algn="ctr">
                         <a:buNone/>
                       </a:pPr>
                       <a:r>
@@ -8948,7 +8897,7 @@
                       </a:endParaRPr>
                     </a:p>
                   </a:txBody>
-                  <a:tcPr marL="91440" marR="91440" marT="45720" marB="45720">
+                  <a:tcPr>
                     <a:lnL w="6350" cap="flat" cmpd="sng" algn="ctr">
                       <a:solidFill>
                         <a:srgbClr val="D0E8EF"/>
@@ -8995,7 +8944,7 @@
                     <a:bodyPr/>
                     <a:lstStyle/>
                     <a:p>
-                      <a:pPr indent="0" marL="0">
+                      <a:pPr marL="0" indent="0">
                         <a:buNone/>
                       </a:pPr>
                       <a:r>
@@ -9016,7 +8965,7 @@
                       </a:endParaRPr>
                     </a:p>
                   </a:txBody>
-                  <a:tcPr marL="91440" marR="91440" marT="45720" marB="45720">
+                  <a:tcPr>
                     <a:lnL w="6350" cap="flat" cmpd="sng" algn="ctr">
                       <a:solidFill>
                         <a:srgbClr val="D0E8EF"/>
@@ -9063,7 +9012,7 @@
                     <a:bodyPr/>
                     <a:lstStyle/>
                     <a:p>
-                      <a:pPr algn="r" indent="0" marL="0">
+                      <a:pPr marL="0" indent="0" algn="r">
                         <a:buNone/>
                       </a:pPr>
                       <a:r>
@@ -9084,7 +9033,7 @@
                       </a:endParaRPr>
                     </a:p>
                   </a:txBody>
-                  <a:tcPr marL="91440" marR="91440" marT="45720" marB="45720">
+                  <a:tcPr>
                     <a:lnL w="6350" cap="flat" cmpd="sng" algn="ctr">
                       <a:solidFill>
                         <a:srgbClr val="D0E8EF"/>
@@ -9126,6 +9075,11 @@
                     </a:solidFill>
                   </a:tcPr>
                 </a:tc>
+                <a:extLst>
+                  <a:ext uri="{0D108BD9-81ED-4DB2-BD59-A6C34878D82A}">
+                    <a16:rowId xmlns:a16="http://schemas.microsoft.com/office/drawing/2014/main" val="10007"/>
+                  </a:ext>
+                </a:extLst>
               </a:tr>
               <a:tr h="356616">
                 <a:tc>
@@ -9133,7 +9087,7 @@
                     <a:bodyPr/>
                     <a:lstStyle/>
                     <a:p>
-                      <a:pPr algn="ctr" indent="0" marL="0">
+                      <a:pPr marL="0" indent="0" algn="ctr">
                         <a:buNone/>
                       </a:pPr>
                       <a:r>
@@ -9154,7 +9108,7 @@
                       </a:endParaRPr>
                     </a:p>
                   </a:txBody>
-                  <a:tcPr marL="91440" marR="91440" marT="45720" marB="45720">
+                  <a:tcPr>
                     <a:lnL w="6350" cap="flat" cmpd="sng" algn="ctr">
                       <a:solidFill>
                         <a:srgbClr val="D0E8EF"/>
@@ -9201,7 +9155,7 @@
                     <a:bodyPr/>
                     <a:lstStyle/>
                     <a:p>
-                      <a:pPr indent="0" marL="0">
+                      <a:pPr marL="0" indent="0">
                         <a:buNone/>
                       </a:pPr>
                       <a:r>
@@ -9222,7 +9176,7 @@
                       </a:endParaRPr>
                     </a:p>
                   </a:txBody>
-                  <a:tcPr marL="91440" marR="91440" marT="45720" marB="45720">
+                  <a:tcPr>
                     <a:lnL w="6350" cap="flat" cmpd="sng" algn="ctr">
                       <a:solidFill>
                         <a:srgbClr val="D0E8EF"/>
@@ -9269,7 +9223,7 @@
                     <a:bodyPr/>
                     <a:lstStyle/>
                     <a:p>
-                      <a:pPr algn="r" indent="0" marL="0">
+                      <a:pPr marL="0" indent="0" algn="r">
                         <a:buNone/>
                       </a:pPr>
                       <a:r>
@@ -9290,7 +9244,7 @@
                       </a:endParaRPr>
                     </a:p>
                   </a:txBody>
-                  <a:tcPr marL="91440" marR="91440" marT="45720" marB="45720">
+                  <a:tcPr>
                     <a:lnL w="6350" cap="flat" cmpd="sng" algn="ctr">
                       <a:solidFill>
                         <a:srgbClr val="D0E8EF"/>
@@ -9332,6 +9286,11 @@
                     </a:solidFill>
                   </a:tcPr>
                 </a:tc>
+                <a:extLst>
+                  <a:ext uri="{0D108BD9-81ED-4DB2-BD59-A6C34878D82A}">
+                    <a16:rowId xmlns:a16="http://schemas.microsoft.com/office/drawing/2014/main" val="10008"/>
+                  </a:ext>
+                </a:extLst>
               </a:tr>
               <a:tr h="356616">
                 <a:tc>
@@ -9339,7 +9298,7 @@
                     <a:bodyPr/>
                     <a:lstStyle/>
                     <a:p>
-                      <a:pPr algn="ctr" indent="0" marL="0">
+                      <a:pPr marL="0" indent="0" algn="ctr">
                         <a:buNone/>
                       </a:pPr>
                       <a:r>
@@ -9360,7 +9319,7 @@
                       </a:endParaRPr>
                     </a:p>
                   </a:txBody>
-                  <a:tcPr marL="91440" marR="91440" marT="45720" marB="45720">
+                  <a:tcPr>
                     <a:lnL w="6350" cap="flat" cmpd="sng" algn="ctr">
                       <a:solidFill>
                         <a:srgbClr val="D0E8EF"/>
@@ -9407,7 +9366,7 @@
                     <a:bodyPr/>
                     <a:lstStyle/>
                     <a:p>
-                      <a:pPr indent="0" marL="0">
+                      <a:pPr marL="0" indent="0">
                         <a:buNone/>
                       </a:pPr>
                       <a:r>
@@ -9428,7 +9387,7 @@
                       </a:endParaRPr>
                     </a:p>
                   </a:txBody>
-                  <a:tcPr marL="91440" marR="91440" marT="45720" marB="45720">
+                  <a:tcPr>
                     <a:lnL w="6350" cap="flat" cmpd="sng" algn="ctr">
                       <a:solidFill>
                         <a:srgbClr val="D0E8EF"/>
@@ -9475,7 +9434,7 @@
                     <a:bodyPr/>
                     <a:lstStyle/>
                     <a:p>
-                      <a:pPr algn="r" indent="0" marL="0">
+                      <a:pPr marL="0" indent="0" algn="r">
                         <a:buNone/>
                       </a:pPr>
                       <a:r>
@@ -9496,7 +9455,7 @@
                       </a:endParaRPr>
                     </a:p>
                   </a:txBody>
-                  <a:tcPr marL="91440" marR="91440" marT="45720" marB="45720">
+                  <a:tcPr>
                     <a:lnL w="6350" cap="flat" cmpd="sng" algn="ctr">
                       <a:solidFill>
                         <a:srgbClr val="D0E8EF"/>
@@ -9538,6 +9497,11 @@
                     </a:solidFill>
                   </a:tcPr>
                 </a:tc>
+                <a:extLst>
+                  <a:ext uri="{0D108BD9-81ED-4DB2-BD59-A6C34878D82A}">
+                    <a16:rowId xmlns:a16="http://schemas.microsoft.com/office/drawing/2014/main" val="10009"/>
+                  </a:ext>
+                </a:extLst>
               </a:tr>
             </a:tbl>
           </a:graphicData>
@@ -9564,7 +9528,7 @@
           <a:bodyPr wrap="square" rtlCol="0" anchor="ctr"/>
           <a:lstStyle/>
           <a:p>
-            <a:pPr algn="l" indent="0" marL="0">
+            <a:pPr marL="0" indent="0" algn="l">
               <a:buNone/>
             </a:pPr>
             <a:r>
@@ -9602,10 +9566,34 @@
             <a:tbl>
               <a:tblPr/>
               <a:tblGrid>
-                <a:gridCol w="347472"/>
-                <a:gridCol w="2304288"/>
-                <a:gridCol w="621792"/>
-                <a:gridCol w="841248"/>
+                <a:gridCol w="347472">
+                  <a:extLst>
+                    <a:ext uri="{9D8B030D-6E8A-4147-A177-3AD203B41FA5}">
+                      <a16:colId xmlns:a16="http://schemas.microsoft.com/office/drawing/2014/main" val="20000"/>
+                    </a:ext>
+                  </a:extLst>
+                </a:gridCol>
+                <a:gridCol w="2304288">
+                  <a:extLst>
+                    <a:ext uri="{9D8B030D-6E8A-4147-A177-3AD203B41FA5}">
+                      <a16:colId xmlns:a16="http://schemas.microsoft.com/office/drawing/2014/main" val="20001"/>
+                    </a:ext>
+                  </a:extLst>
+                </a:gridCol>
+                <a:gridCol w="621792">
+                  <a:extLst>
+                    <a:ext uri="{9D8B030D-6E8A-4147-A177-3AD203B41FA5}">
+                      <a16:colId xmlns:a16="http://schemas.microsoft.com/office/drawing/2014/main" val="20002"/>
+                    </a:ext>
+                  </a:extLst>
+                </a:gridCol>
+                <a:gridCol w="841248">
+                  <a:extLst>
+                    <a:ext uri="{9D8B030D-6E8A-4147-A177-3AD203B41FA5}">
+                      <a16:colId xmlns:a16="http://schemas.microsoft.com/office/drawing/2014/main" val="20003"/>
+                    </a:ext>
+                  </a:extLst>
+                </a:gridCol>
               </a:tblGrid>
               <a:tr h="356616">
                 <a:tc>
@@ -9613,7 +9601,7 @@
                     <a:bodyPr/>
                     <a:lstStyle/>
                     <a:p>
-                      <a:pPr algn="ctr" indent="0" marL="0">
+                      <a:pPr marL="0" indent="0" algn="ctr">
                         <a:buNone/>
                       </a:pPr>
                       <a:r>
@@ -9634,7 +9622,7 @@
                       </a:endParaRPr>
                     </a:p>
                   </a:txBody>
-                  <a:tcPr marL="91440" marR="91440" marT="45720" marB="45720">
+                  <a:tcPr>
                     <a:lnL w="6350" cap="flat" cmpd="sng" algn="ctr">
                       <a:solidFill>
                         <a:srgbClr val="D0E8EF"/>
@@ -9681,7 +9669,7 @@
                     <a:bodyPr/>
                     <a:lstStyle/>
                     <a:p>
-                      <a:pPr indent="0" marL="0">
+                      <a:pPr marL="0" indent="0">
                         <a:buNone/>
                       </a:pPr>
                       <a:r>
@@ -9702,7 +9690,7 @@
                       </a:endParaRPr>
                     </a:p>
                   </a:txBody>
-                  <a:tcPr marL="91440" marR="91440" marT="45720" marB="45720">
+                  <a:tcPr>
                     <a:lnL w="6350" cap="flat" cmpd="sng" algn="ctr">
                       <a:solidFill>
                         <a:srgbClr val="D0E8EF"/>
@@ -9749,7 +9737,7 @@
                     <a:bodyPr/>
                     <a:lstStyle/>
                     <a:p>
-                      <a:pPr algn="ctr" indent="0" marL="0">
+                      <a:pPr marL="0" indent="0" algn="ctr">
                         <a:buNone/>
                       </a:pPr>
                       <a:r>
@@ -9770,7 +9758,7 @@
                       </a:endParaRPr>
                     </a:p>
                   </a:txBody>
-                  <a:tcPr marL="91440" marR="91440" marT="45720" marB="45720">
+                  <a:tcPr>
                     <a:lnL w="6350" cap="flat" cmpd="sng" algn="ctr">
                       <a:solidFill>
                         <a:srgbClr val="D0E8EF"/>
@@ -9817,7 +9805,7 @@
                     <a:bodyPr/>
                     <a:lstStyle/>
                     <a:p>
-                      <a:pPr algn="r" indent="0" marL="0">
+                      <a:pPr marL="0" indent="0" algn="r">
                         <a:buNone/>
                       </a:pPr>
                       <a:r>
@@ -9838,7 +9826,7 @@
                       </a:endParaRPr>
                     </a:p>
                   </a:txBody>
-                  <a:tcPr marL="91440" marR="91440" marT="45720" marB="45720">
+                  <a:tcPr>
                     <a:lnL w="6350" cap="flat" cmpd="sng" algn="ctr">
                       <a:solidFill>
                         <a:srgbClr val="D0E8EF"/>
@@ -9880,6 +9868,11 @@
                     </a:solidFill>
                   </a:tcPr>
                 </a:tc>
+                <a:extLst>
+                  <a:ext uri="{0D108BD9-81ED-4DB2-BD59-A6C34878D82A}">
+                    <a16:rowId xmlns:a16="http://schemas.microsoft.com/office/drawing/2014/main" val="10000"/>
+                  </a:ext>
+                </a:extLst>
               </a:tr>
               <a:tr h="356616">
                 <a:tc>
@@ -9887,7 +9880,7 @@
                     <a:bodyPr/>
                     <a:lstStyle/>
                     <a:p>
-                      <a:pPr algn="ctr" indent="0" marL="0">
+                      <a:pPr marL="0" indent="0" algn="ctr">
                         <a:buNone/>
                       </a:pPr>
                       <a:r>
@@ -9908,7 +9901,7 @@
                       </a:endParaRPr>
                     </a:p>
                   </a:txBody>
-                  <a:tcPr marL="91440" marR="91440" marT="45720" marB="45720">
+                  <a:tcPr>
                     <a:lnL w="6350" cap="flat" cmpd="sng" algn="ctr">
                       <a:solidFill>
                         <a:srgbClr val="D0E8EF"/>
@@ -9955,7 +9948,7 @@
                     <a:bodyPr/>
                     <a:lstStyle/>
                     <a:p>
-                      <a:pPr indent="0" marL="0">
+                      <a:pPr marL="0" indent="0">
                         <a:buNone/>
                       </a:pPr>
                       <a:r>
@@ -9976,7 +9969,7 @@
                       </a:endParaRPr>
                     </a:p>
                   </a:txBody>
-                  <a:tcPr marL="91440" marR="91440" marT="45720" marB="45720">
+                  <a:tcPr>
                     <a:lnL w="6350" cap="flat" cmpd="sng" algn="ctr">
                       <a:solidFill>
                         <a:srgbClr val="D0E8EF"/>
@@ -10023,7 +10016,7 @@
                     <a:bodyPr/>
                     <a:lstStyle/>
                     <a:p>
-                      <a:pPr algn="ctr" indent="0" marL="0">
+                      <a:pPr marL="0" indent="0" algn="ctr">
                         <a:buNone/>
                       </a:pPr>
                       <a:r>
@@ -10044,7 +10037,7 @@
                       </a:endParaRPr>
                     </a:p>
                   </a:txBody>
-                  <a:tcPr marL="91440" marR="91440" marT="45720" marB="45720">
+                  <a:tcPr>
                     <a:lnL w="6350" cap="flat" cmpd="sng" algn="ctr">
                       <a:solidFill>
                         <a:srgbClr val="D0E8EF"/>
@@ -10091,7 +10084,7 @@
                     <a:bodyPr/>
                     <a:lstStyle/>
                     <a:p>
-                      <a:pPr algn="r" indent="0" marL="0">
+                      <a:pPr marL="0" indent="0" algn="r">
                         <a:buNone/>
                       </a:pPr>
                       <a:r>
@@ -10112,7 +10105,7 @@
                       </a:endParaRPr>
                     </a:p>
                   </a:txBody>
-                  <a:tcPr marL="91440" marR="91440" marT="45720" marB="45720">
+                  <a:tcPr>
                     <a:lnL w="6350" cap="flat" cmpd="sng" algn="ctr">
                       <a:solidFill>
                         <a:srgbClr val="D0E8EF"/>
@@ -10154,6 +10147,11 @@
                     </a:solidFill>
                   </a:tcPr>
                 </a:tc>
+                <a:extLst>
+                  <a:ext uri="{0D108BD9-81ED-4DB2-BD59-A6C34878D82A}">
+                    <a16:rowId xmlns:a16="http://schemas.microsoft.com/office/drawing/2014/main" val="10001"/>
+                  </a:ext>
+                </a:extLst>
               </a:tr>
               <a:tr h="356616">
                 <a:tc>
@@ -10161,7 +10159,7 @@
                     <a:bodyPr/>
                     <a:lstStyle/>
                     <a:p>
-                      <a:pPr algn="ctr" indent="0" marL="0">
+                      <a:pPr marL="0" indent="0" algn="ctr">
                         <a:buNone/>
                       </a:pPr>
                       <a:r>
@@ -10182,7 +10180,7 @@
                       </a:endParaRPr>
                     </a:p>
                   </a:txBody>
-                  <a:tcPr marL="91440" marR="91440" marT="45720" marB="45720">
+                  <a:tcPr>
                     <a:lnL w="6350" cap="flat" cmpd="sng" algn="ctr">
                       <a:solidFill>
                         <a:srgbClr val="D0E8EF"/>
@@ -10229,7 +10227,7 @@
                     <a:bodyPr/>
                     <a:lstStyle/>
                     <a:p>
-                      <a:pPr indent="0" marL="0">
+                      <a:pPr marL="0" indent="0">
                         <a:buNone/>
                       </a:pPr>
                       <a:r>
@@ -10250,7 +10248,7 @@
                       </a:endParaRPr>
                     </a:p>
                   </a:txBody>
-                  <a:tcPr marL="91440" marR="91440" marT="45720" marB="45720">
+                  <a:tcPr>
                     <a:lnL w="6350" cap="flat" cmpd="sng" algn="ctr">
                       <a:solidFill>
                         <a:srgbClr val="D0E8EF"/>
@@ -10297,7 +10295,7 @@
                     <a:bodyPr/>
                     <a:lstStyle/>
                     <a:p>
-                      <a:pPr algn="ctr" indent="0" marL="0">
+                      <a:pPr marL="0" indent="0" algn="ctr">
                         <a:buNone/>
                       </a:pPr>
                       <a:r>
@@ -10318,7 +10316,7 @@
                       </a:endParaRPr>
                     </a:p>
                   </a:txBody>
-                  <a:tcPr marL="91440" marR="91440" marT="45720" marB="45720">
+                  <a:tcPr>
                     <a:lnL w="6350" cap="flat" cmpd="sng" algn="ctr">
                       <a:solidFill>
                         <a:srgbClr val="D0E8EF"/>
@@ -10365,7 +10363,7 @@
                     <a:bodyPr/>
                     <a:lstStyle/>
                     <a:p>
-                      <a:pPr algn="r" indent="0" marL="0">
+                      <a:pPr marL="0" indent="0" algn="r">
                         <a:buNone/>
                       </a:pPr>
                       <a:r>
@@ -10386,7 +10384,7 @@
                       </a:endParaRPr>
                     </a:p>
                   </a:txBody>
-                  <a:tcPr marL="91440" marR="91440" marT="45720" marB="45720">
+                  <a:tcPr>
                     <a:lnL w="6350" cap="flat" cmpd="sng" algn="ctr">
                       <a:solidFill>
                         <a:srgbClr val="D0E8EF"/>
@@ -10428,6 +10426,11 @@
                     </a:solidFill>
                   </a:tcPr>
                 </a:tc>
+                <a:extLst>
+                  <a:ext uri="{0D108BD9-81ED-4DB2-BD59-A6C34878D82A}">
+                    <a16:rowId xmlns:a16="http://schemas.microsoft.com/office/drawing/2014/main" val="10002"/>
+                  </a:ext>
+                </a:extLst>
               </a:tr>
               <a:tr h="356616">
                 <a:tc>
@@ -10435,7 +10438,7 @@
                     <a:bodyPr/>
                     <a:lstStyle/>
                     <a:p>
-                      <a:pPr algn="ctr" indent="0" marL="0">
+                      <a:pPr marL="0" indent="0" algn="ctr">
                         <a:buNone/>
                       </a:pPr>
                       <a:r>
@@ -10456,7 +10459,7 @@
                       </a:endParaRPr>
                     </a:p>
                   </a:txBody>
-                  <a:tcPr marL="91440" marR="91440" marT="45720" marB="45720">
+                  <a:tcPr>
                     <a:lnL w="6350" cap="flat" cmpd="sng" algn="ctr">
                       <a:solidFill>
                         <a:srgbClr val="D0E8EF"/>
@@ -10503,7 +10506,7 @@
                     <a:bodyPr/>
                     <a:lstStyle/>
                     <a:p>
-                      <a:pPr indent="0" marL="0">
+                      <a:pPr marL="0" indent="0">
                         <a:buNone/>
                       </a:pPr>
                       <a:r>
@@ -10524,7 +10527,7 @@
                       </a:endParaRPr>
                     </a:p>
                   </a:txBody>
-                  <a:tcPr marL="91440" marR="91440" marT="45720" marB="45720">
+                  <a:tcPr>
                     <a:lnL w="6350" cap="flat" cmpd="sng" algn="ctr">
                       <a:solidFill>
                         <a:srgbClr val="D0E8EF"/>
@@ -10571,7 +10574,7 @@
                     <a:bodyPr/>
                     <a:lstStyle/>
                     <a:p>
-                      <a:pPr algn="ctr" indent="0" marL="0">
+                      <a:pPr marL="0" indent="0" algn="ctr">
                         <a:buNone/>
                       </a:pPr>
                       <a:r>
@@ -10592,7 +10595,7 @@
                       </a:endParaRPr>
                     </a:p>
                   </a:txBody>
-                  <a:tcPr marL="91440" marR="91440" marT="45720" marB="45720">
+                  <a:tcPr>
                     <a:lnL w="6350" cap="flat" cmpd="sng" algn="ctr">
                       <a:solidFill>
                         <a:srgbClr val="D0E8EF"/>
@@ -10639,7 +10642,7 @@
                     <a:bodyPr/>
                     <a:lstStyle/>
                     <a:p>
-                      <a:pPr algn="r" indent="0" marL="0">
+                      <a:pPr marL="0" indent="0" algn="r">
                         <a:buNone/>
                       </a:pPr>
                       <a:r>
@@ -10660,7 +10663,7 @@
                       </a:endParaRPr>
                     </a:p>
                   </a:txBody>
-                  <a:tcPr marL="91440" marR="91440" marT="45720" marB="45720">
+                  <a:tcPr>
                     <a:lnL w="6350" cap="flat" cmpd="sng" algn="ctr">
                       <a:solidFill>
                         <a:srgbClr val="D0E8EF"/>
@@ -10702,6 +10705,11 @@
                     </a:solidFill>
                   </a:tcPr>
                 </a:tc>
+                <a:extLst>
+                  <a:ext uri="{0D108BD9-81ED-4DB2-BD59-A6C34878D82A}">
+                    <a16:rowId xmlns:a16="http://schemas.microsoft.com/office/drawing/2014/main" val="10003"/>
+                  </a:ext>
+                </a:extLst>
               </a:tr>
               <a:tr h="356616">
                 <a:tc>
@@ -10709,7 +10717,7 @@
                     <a:bodyPr/>
                     <a:lstStyle/>
                     <a:p>
-                      <a:pPr algn="ctr" indent="0" marL="0">
+                      <a:pPr marL="0" indent="0" algn="ctr">
                         <a:buNone/>
                       </a:pPr>
                       <a:r>
@@ -10730,7 +10738,7 @@
                       </a:endParaRPr>
                     </a:p>
                   </a:txBody>
-                  <a:tcPr marL="91440" marR="91440" marT="45720" marB="45720">
+                  <a:tcPr>
                     <a:lnL w="6350" cap="flat" cmpd="sng" algn="ctr">
                       <a:solidFill>
                         <a:srgbClr val="D0E8EF"/>
@@ -10777,7 +10785,7 @@
                     <a:bodyPr/>
                     <a:lstStyle/>
                     <a:p>
-                      <a:pPr indent="0" marL="0">
+                      <a:pPr marL="0" indent="0">
                         <a:buNone/>
                       </a:pPr>
                       <a:r>
@@ -10798,7 +10806,7 @@
                       </a:endParaRPr>
                     </a:p>
                   </a:txBody>
-                  <a:tcPr marL="91440" marR="91440" marT="45720" marB="45720">
+                  <a:tcPr>
                     <a:lnL w="6350" cap="flat" cmpd="sng" algn="ctr">
                       <a:solidFill>
                         <a:srgbClr val="D0E8EF"/>
@@ -10845,7 +10853,7 @@
                     <a:bodyPr/>
                     <a:lstStyle/>
                     <a:p>
-                      <a:pPr algn="ctr" indent="0" marL="0">
+                      <a:pPr marL="0" indent="0" algn="ctr">
                         <a:buNone/>
                       </a:pPr>
                       <a:r>
@@ -10866,7 +10874,7 @@
                       </a:endParaRPr>
                     </a:p>
                   </a:txBody>
-                  <a:tcPr marL="91440" marR="91440" marT="45720" marB="45720">
+                  <a:tcPr>
                     <a:lnL w="6350" cap="flat" cmpd="sng" algn="ctr">
                       <a:solidFill>
                         <a:srgbClr val="D0E8EF"/>
@@ -10913,7 +10921,7 @@
                     <a:bodyPr/>
                     <a:lstStyle/>
                     <a:p>
-                      <a:pPr algn="r" indent="0" marL="0">
+                      <a:pPr marL="0" indent="0" algn="r">
                         <a:buNone/>
                       </a:pPr>
                       <a:r>
@@ -10934,7 +10942,7 @@
                       </a:endParaRPr>
                     </a:p>
                   </a:txBody>
-                  <a:tcPr marL="91440" marR="91440" marT="45720" marB="45720">
+                  <a:tcPr>
                     <a:lnL w="6350" cap="flat" cmpd="sng" algn="ctr">
                       <a:solidFill>
                         <a:srgbClr val="D0E8EF"/>
@@ -10976,6 +10984,11 @@
                     </a:solidFill>
                   </a:tcPr>
                 </a:tc>
+                <a:extLst>
+                  <a:ext uri="{0D108BD9-81ED-4DB2-BD59-A6C34878D82A}">
+                    <a16:rowId xmlns:a16="http://schemas.microsoft.com/office/drawing/2014/main" val="10004"/>
+                  </a:ext>
+                </a:extLst>
               </a:tr>
               <a:tr h="356616">
                 <a:tc>
@@ -10983,7 +10996,7 @@
                     <a:bodyPr/>
                     <a:lstStyle/>
                     <a:p>
-                      <a:pPr algn="ctr" indent="0" marL="0">
+                      <a:pPr marL="0" indent="0" algn="ctr">
                         <a:buNone/>
                       </a:pPr>
                       <a:r>
@@ -11004,7 +11017,7 @@
                       </a:endParaRPr>
                     </a:p>
                   </a:txBody>
-                  <a:tcPr marL="91440" marR="91440" marT="45720" marB="45720">
+                  <a:tcPr>
                     <a:lnL w="6350" cap="flat" cmpd="sng" algn="ctr">
                       <a:solidFill>
                         <a:srgbClr val="D0E8EF"/>
@@ -11051,7 +11064,7 @@
                     <a:bodyPr/>
                     <a:lstStyle/>
                     <a:p>
-                      <a:pPr indent="0" marL="0">
+                      <a:pPr marL="0" indent="0">
                         <a:buNone/>
                       </a:pPr>
                       <a:r>
@@ -11072,7 +11085,7 @@
                       </a:endParaRPr>
                     </a:p>
                   </a:txBody>
-                  <a:tcPr marL="91440" marR="91440" marT="45720" marB="45720">
+                  <a:tcPr>
                     <a:lnL w="6350" cap="flat" cmpd="sng" algn="ctr">
                       <a:solidFill>
                         <a:srgbClr val="D0E8EF"/>
@@ -11119,7 +11132,7 @@
                     <a:bodyPr/>
                     <a:lstStyle/>
                     <a:p>
-                      <a:pPr algn="ctr" indent="0" marL="0">
+                      <a:pPr marL="0" indent="0" algn="ctr">
                         <a:buNone/>
                       </a:pPr>
                       <a:r>
@@ -11140,7 +11153,7 @@
                       </a:endParaRPr>
                     </a:p>
                   </a:txBody>
-                  <a:tcPr marL="91440" marR="91440" marT="45720" marB="45720">
+                  <a:tcPr>
                     <a:lnL w="6350" cap="flat" cmpd="sng" algn="ctr">
                       <a:solidFill>
                         <a:srgbClr val="D0E8EF"/>
@@ -11187,7 +11200,7 @@
                     <a:bodyPr/>
                     <a:lstStyle/>
                     <a:p>
-                      <a:pPr algn="r" indent="0" marL="0">
+                      <a:pPr marL="0" indent="0" algn="r">
                         <a:buNone/>
                       </a:pPr>
                       <a:r>
@@ -11208,7 +11221,7 @@
                       </a:endParaRPr>
                     </a:p>
                   </a:txBody>
-                  <a:tcPr marL="91440" marR="91440" marT="45720" marB="45720">
+                  <a:tcPr>
                     <a:lnL w="6350" cap="flat" cmpd="sng" algn="ctr">
                       <a:solidFill>
                         <a:srgbClr val="D0E8EF"/>
@@ -11250,6 +11263,11 @@
                     </a:solidFill>
                   </a:tcPr>
                 </a:tc>
+                <a:extLst>
+                  <a:ext uri="{0D108BD9-81ED-4DB2-BD59-A6C34878D82A}">
+                    <a16:rowId xmlns:a16="http://schemas.microsoft.com/office/drawing/2014/main" val="10005"/>
+                  </a:ext>
+                </a:extLst>
               </a:tr>
               <a:tr h="356616">
                 <a:tc>
@@ -11257,7 +11275,7 @@
                     <a:bodyPr/>
                     <a:lstStyle/>
                     <a:p>
-                      <a:pPr algn="ctr" indent="0" marL="0">
+                      <a:pPr marL="0" indent="0" algn="ctr">
                         <a:buNone/>
                       </a:pPr>
                       <a:r>
@@ -11278,7 +11296,7 @@
                       </a:endParaRPr>
                     </a:p>
                   </a:txBody>
-                  <a:tcPr marL="91440" marR="91440" marT="45720" marB="45720">
+                  <a:tcPr>
                     <a:lnL w="6350" cap="flat" cmpd="sng" algn="ctr">
                       <a:solidFill>
                         <a:srgbClr val="D0E8EF"/>
@@ -11325,7 +11343,7 @@
                     <a:bodyPr/>
                     <a:lstStyle/>
                     <a:p>
-                      <a:pPr indent="0" marL="0">
+                      <a:pPr marL="0" indent="0">
                         <a:buNone/>
                       </a:pPr>
                       <a:r>
@@ -11346,7 +11364,7 @@
                       </a:endParaRPr>
                     </a:p>
                   </a:txBody>
-                  <a:tcPr marL="91440" marR="91440" marT="45720" marB="45720">
+                  <a:tcPr>
                     <a:lnL w="6350" cap="flat" cmpd="sng" algn="ctr">
                       <a:solidFill>
                         <a:srgbClr val="D0E8EF"/>
@@ -11393,7 +11411,7 @@
                     <a:bodyPr/>
                     <a:lstStyle/>
                     <a:p>
-                      <a:pPr algn="ctr" indent="0" marL="0">
+                      <a:pPr marL="0" indent="0" algn="ctr">
                         <a:buNone/>
                       </a:pPr>
                       <a:r>
@@ -11414,7 +11432,7 @@
                       </a:endParaRPr>
                     </a:p>
                   </a:txBody>
-                  <a:tcPr marL="91440" marR="91440" marT="45720" marB="45720">
+                  <a:tcPr>
                     <a:lnL w="6350" cap="flat" cmpd="sng" algn="ctr">
                       <a:solidFill>
                         <a:srgbClr val="D0E8EF"/>
@@ -11461,7 +11479,7 @@
                     <a:bodyPr/>
                     <a:lstStyle/>
                     <a:p>
-                      <a:pPr algn="r" indent="0" marL="0">
+                      <a:pPr marL="0" indent="0" algn="r">
                         <a:buNone/>
                       </a:pPr>
                       <a:r>
@@ -11482,7 +11500,7 @@
                       </a:endParaRPr>
                     </a:p>
                   </a:txBody>
-                  <a:tcPr marL="91440" marR="91440" marT="45720" marB="45720">
+                  <a:tcPr>
                     <a:lnL w="6350" cap="flat" cmpd="sng" algn="ctr">
                       <a:solidFill>
                         <a:srgbClr val="D0E8EF"/>
@@ -11524,6 +11542,11 @@
                     </a:solidFill>
                   </a:tcPr>
                 </a:tc>
+                <a:extLst>
+                  <a:ext uri="{0D108BD9-81ED-4DB2-BD59-A6C34878D82A}">
+                    <a16:rowId xmlns:a16="http://schemas.microsoft.com/office/drawing/2014/main" val="10006"/>
+                  </a:ext>
+                </a:extLst>
               </a:tr>
               <a:tr h="356616">
                 <a:tc>
@@ -11531,7 +11554,7 @@
                     <a:bodyPr/>
                     <a:lstStyle/>
                     <a:p>
-                      <a:pPr algn="ctr" indent="0" marL="0">
+                      <a:pPr marL="0" indent="0" algn="ctr">
                         <a:buNone/>
                       </a:pPr>
                       <a:r>
@@ -11552,7 +11575,7 @@
                       </a:endParaRPr>
                     </a:p>
                   </a:txBody>
-                  <a:tcPr marL="91440" marR="91440" marT="45720" marB="45720">
+                  <a:tcPr>
                     <a:lnL w="6350" cap="flat" cmpd="sng" algn="ctr">
                       <a:solidFill>
                         <a:srgbClr val="D0E8EF"/>
@@ -11599,7 +11622,7 @@
                     <a:bodyPr/>
                     <a:lstStyle/>
                     <a:p>
-                      <a:pPr indent="0" marL="0">
+                      <a:pPr marL="0" indent="0">
                         <a:buNone/>
                       </a:pPr>
                       <a:r>
@@ -11620,7 +11643,7 @@
                       </a:endParaRPr>
                     </a:p>
                   </a:txBody>
-                  <a:tcPr marL="91440" marR="91440" marT="45720" marB="45720">
+                  <a:tcPr>
                     <a:lnL w="6350" cap="flat" cmpd="sng" algn="ctr">
                       <a:solidFill>
                         <a:srgbClr val="D0E8EF"/>
@@ -11667,7 +11690,7 @@
                     <a:bodyPr/>
                     <a:lstStyle/>
                     <a:p>
-                      <a:pPr algn="ctr" indent="0" marL="0">
+                      <a:pPr marL="0" indent="0" algn="ctr">
                         <a:buNone/>
                       </a:pPr>
                       <a:r>
@@ -11688,7 +11711,7 @@
                       </a:endParaRPr>
                     </a:p>
                   </a:txBody>
-                  <a:tcPr marL="91440" marR="91440" marT="45720" marB="45720">
+                  <a:tcPr>
                     <a:lnL w="6350" cap="flat" cmpd="sng" algn="ctr">
                       <a:solidFill>
                         <a:srgbClr val="D0E8EF"/>
@@ -11735,7 +11758,7 @@
                     <a:bodyPr/>
                     <a:lstStyle/>
                     <a:p>
-                      <a:pPr algn="r" indent="0" marL="0">
+                      <a:pPr marL="0" indent="0" algn="r">
                         <a:buNone/>
                       </a:pPr>
                       <a:r>
@@ -11756,7 +11779,7 @@
                       </a:endParaRPr>
                     </a:p>
                   </a:txBody>
-                  <a:tcPr marL="91440" marR="91440" marT="45720" marB="45720">
+                  <a:tcPr>
                     <a:lnL w="6350" cap="flat" cmpd="sng" algn="ctr">
                       <a:solidFill>
                         <a:srgbClr val="D0E8EF"/>
@@ -11798,6 +11821,11 @@
                     </a:solidFill>
                   </a:tcPr>
                 </a:tc>
+                <a:extLst>
+                  <a:ext uri="{0D108BD9-81ED-4DB2-BD59-A6C34878D82A}">
+                    <a16:rowId xmlns:a16="http://schemas.microsoft.com/office/drawing/2014/main" val="10007"/>
+                  </a:ext>
+                </a:extLst>
               </a:tr>
               <a:tr h="356616">
                 <a:tc>
@@ -11805,7 +11833,7 @@
                     <a:bodyPr/>
                     <a:lstStyle/>
                     <a:p>
-                      <a:pPr algn="ctr" indent="0" marL="0">
+                      <a:pPr marL="0" indent="0" algn="ctr">
                         <a:buNone/>
                       </a:pPr>
                       <a:r>
@@ -11826,7 +11854,7 @@
                       </a:endParaRPr>
                     </a:p>
                   </a:txBody>
-                  <a:tcPr marL="91440" marR="91440" marT="45720" marB="45720">
+                  <a:tcPr>
                     <a:lnL w="6350" cap="flat" cmpd="sng" algn="ctr">
                       <a:solidFill>
                         <a:srgbClr val="D0E8EF"/>
@@ -11873,7 +11901,7 @@
                     <a:bodyPr/>
                     <a:lstStyle/>
                     <a:p>
-                      <a:pPr indent="0" marL="0">
+                      <a:pPr marL="0" indent="0">
                         <a:buNone/>
                       </a:pPr>
                       <a:r>
@@ -11894,7 +11922,7 @@
                       </a:endParaRPr>
                     </a:p>
                   </a:txBody>
-                  <a:tcPr marL="91440" marR="91440" marT="45720" marB="45720">
+                  <a:tcPr>
                     <a:lnL w="6350" cap="flat" cmpd="sng" algn="ctr">
                       <a:solidFill>
                         <a:srgbClr val="D0E8EF"/>
@@ -11941,7 +11969,7 @@
                     <a:bodyPr/>
                     <a:lstStyle/>
                     <a:p>
-                      <a:pPr algn="ctr" indent="0" marL="0">
+                      <a:pPr marL="0" indent="0" algn="ctr">
                         <a:buNone/>
                       </a:pPr>
                       <a:r>
@@ -11962,7 +11990,7 @@
                       </a:endParaRPr>
                     </a:p>
                   </a:txBody>
-                  <a:tcPr marL="91440" marR="91440" marT="45720" marB="45720">
+                  <a:tcPr>
                     <a:lnL w="6350" cap="flat" cmpd="sng" algn="ctr">
                       <a:solidFill>
                         <a:srgbClr val="D0E8EF"/>
@@ -12009,7 +12037,7 @@
                     <a:bodyPr/>
                     <a:lstStyle/>
                     <a:p>
-                      <a:pPr algn="r" indent="0" marL="0">
+                      <a:pPr marL="0" indent="0" algn="r">
                         <a:buNone/>
                       </a:pPr>
                       <a:r>
@@ -12030,7 +12058,7 @@
                       </a:endParaRPr>
                     </a:p>
                   </a:txBody>
-                  <a:tcPr marL="91440" marR="91440" marT="45720" marB="45720">
+                  <a:tcPr>
                     <a:lnL w="6350" cap="flat" cmpd="sng" algn="ctr">
                       <a:solidFill>
                         <a:srgbClr val="D0E8EF"/>
@@ -12072,6 +12100,11 @@
                     </a:solidFill>
                   </a:tcPr>
                 </a:tc>
+                <a:extLst>
+                  <a:ext uri="{0D108BD9-81ED-4DB2-BD59-A6C34878D82A}">
+                    <a16:rowId xmlns:a16="http://schemas.microsoft.com/office/drawing/2014/main" val="10008"/>
+                  </a:ext>
+                </a:extLst>
               </a:tr>
               <a:tr h="356616">
                 <a:tc>
@@ -12079,7 +12112,7 @@
                     <a:bodyPr/>
                     <a:lstStyle/>
                     <a:p>
-                      <a:pPr algn="ctr" indent="0" marL="0">
+                      <a:pPr marL="0" indent="0" algn="ctr">
                         <a:buNone/>
                       </a:pPr>
                       <a:r>
@@ -12100,7 +12133,7 @@
                       </a:endParaRPr>
                     </a:p>
                   </a:txBody>
-                  <a:tcPr marL="91440" marR="91440" marT="45720" marB="45720">
+                  <a:tcPr>
                     <a:lnL w="6350" cap="flat" cmpd="sng" algn="ctr">
                       <a:solidFill>
                         <a:srgbClr val="D0E8EF"/>
@@ -12147,7 +12180,7 @@
                     <a:bodyPr/>
                     <a:lstStyle/>
                     <a:p>
-                      <a:pPr indent="0" marL="0">
+                      <a:pPr marL="0" indent="0">
                         <a:buNone/>
                       </a:pPr>
                       <a:r>
@@ -12168,7 +12201,7 @@
                       </a:endParaRPr>
                     </a:p>
                   </a:txBody>
-                  <a:tcPr marL="91440" marR="91440" marT="45720" marB="45720">
+                  <a:tcPr>
                     <a:lnL w="6350" cap="flat" cmpd="sng" algn="ctr">
                       <a:solidFill>
                         <a:srgbClr val="D0E8EF"/>
@@ -12215,7 +12248,7 @@
                     <a:bodyPr/>
                     <a:lstStyle/>
                     <a:p>
-                      <a:pPr algn="ctr" indent="0" marL="0">
+                      <a:pPr marL="0" indent="0" algn="ctr">
                         <a:buNone/>
                       </a:pPr>
                       <a:r>
@@ -12236,7 +12269,7 @@
                       </a:endParaRPr>
                     </a:p>
                   </a:txBody>
-                  <a:tcPr marL="91440" marR="91440" marT="45720" marB="45720">
+                  <a:tcPr>
                     <a:lnL w="6350" cap="flat" cmpd="sng" algn="ctr">
                       <a:solidFill>
                         <a:srgbClr val="D0E8EF"/>
@@ -12283,7 +12316,7 @@
                     <a:bodyPr/>
                     <a:lstStyle/>
                     <a:p>
-                      <a:pPr algn="r" indent="0" marL="0">
+                      <a:pPr marL="0" indent="0" algn="r">
                         <a:buNone/>
                       </a:pPr>
                       <a:r>
@@ -12304,7 +12337,7 @@
                       </a:endParaRPr>
                     </a:p>
                   </a:txBody>
-                  <a:tcPr marL="91440" marR="91440" marT="45720" marB="45720">
+                  <a:tcPr>
                     <a:lnL w="6350" cap="flat" cmpd="sng" algn="ctr">
                       <a:solidFill>
                         <a:srgbClr val="D0E8EF"/>
@@ -12346,6 +12379,11 @@
                     </a:solidFill>
                   </a:tcPr>
                 </a:tc>
+                <a:extLst>
+                  <a:ext uri="{0D108BD9-81ED-4DB2-BD59-A6C34878D82A}">
+                    <a16:rowId xmlns:a16="http://schemas.microsoft.com/office/drawing/2014/main" val="10009"/>
+                  </a:ext>
+                </a:extLst>
               </a:tr>
             </a:tbl>
           </a:graphicData>
@@ -12372,7 +12410,7 @@
           <a:bodyPr wrap="square" rtlCol="0" anchor="ctr"/>
           <a:lstStyle/>
           <a:p>
-            <a:pPr algn="l" indent="0" marL="0">
+            <a:pPr marL="0" indent="0" algn="l">
               <a:buNone/>
             </a:pPr>
             <a:r>
@@ -12688,4 +12726,299 @@
     </a:ext>
   </a:extLst>
 </a:theme>
+</file>
+
+<file path=ppt/theme/theme2.xml><?xml version="1.0" encoding="utf-8"?>
+<a:theme xmlns:a="http://schemas.openxmlformats.org/drawingml/2006/main" name="Tema do Office">
+  <a:themeElements>
+    <a:clrScheme name="Office">
+      <a:dk1>
+        <a:sysClr val="windowText" lastClr="000000"/>
+      </a:dk1>
+      <a:lt1>
+        <a:sysClr val="window" lastClr="FFFFFF"/>
+      </a:lt1>
+      <a:dk2>
+        <a:srgbClr val="44546A"/>
+      </a:dk2>
+      <a:lt2>
+        <a:srgbClr val="E7E6E6"/>
+      </a:lt2>
+      <a:accent1>
+        <a:srgbClr val="4472C4"/>
+      </a:accent1>
+      <a:accent2>
+        <a:srgbClr val="ED7D31"/>
+      </a:accent2>
+      <a:accent3>
+        <a:srgbClr val="A5A5A5"/>
+      </a:accent3>
+      <a:accent4>
+        <a:srgbClr val="FFC000"/>
+      </a:accent4>
+      <a:accent5>
+        <a:srgbClr val="5B9BD5"/>
+      </a:accent5>
+      <a:accent6>
+        <a:srgbClr val="70AD47"/>
+      </a:accent6>
+      <a:hlink>
+        <a:srgbClr val="0563C1"/>
+      </a:hlink>
+      <a:folHlink>
+        <a:srgbClr val="954F72"/>
+      </a:folHlink>
+    </a:clrScheme>
+    <a:fontScheme name="Office">
+      <a:majorFont>
+        <a:latin typeface="Calibri Light" panose="020F0302020204030204"/>
+        <a:ea typeface=""/>
+        <a:cs typeface=""/>
+        <a:font script="Jpan" typeface="游ゴシック Light"/>
+        <a:font script="Hang" typeface="맑은 고딕"/>
+        <a:font script="Hans" typeface="等线 Light"/>
+        <a:font script="Hant" typeface="新細明體"/>
+        <a:font script="Arab" typeface="Times New Roman"/>
+        <a:font script="Hebr" typeface="Times New Roman"/>
+        <a:font script="Thai" typeface="Angsana New"/>
+        <a:font script="Ethi" typeface="Nyala"/>
+        <a:font script="Beng" typeface="Vrinda"/>
+        <a:font script="Gujr" typeface="Shruti"/>
+        <a:font script="Khmr" typeface="MoolBoran"/>
+        <a:font script="Knda" typeface="Tunga"/>
+        <a:font script="Guru" typeface="Raavi"/>
+        <a:font script="Cans" typeface="Euphemia"/>
+        <a:font script="Cher" typeface="Plantagenet Cherokee"/>
+        <a:font script="Yiii" typeface="Microsoft Yi Baiti"/>
+        <a:font script="Tibt" typeface="Microsoft Himalaya"/>
+        <a:font script="Thaa" typeface="MV Boli"/>
+        <a:font script="Deva" typeface="Mangal"/>
+        <a:font script="Telu" typeface="Gautami"/>
+        <a:font script="Taml" typeface="Latha"/>
+        <a:font script="Syrc" typeface="Estrangelo Edessa"/>
+        <a:font script="Orya" typeface="Kalinga"/>
+        <a:font script="Mlym" typeface="Kartika"/>
+        <a:font script="Laoo" typeface="DokChampa"/>
+        <a:font script="Sinh" typeface="Iskoola Pota"/>
+        <a:font script="Mong" typeface="Mongolian Baiti"/>
+        <a:font script="Viet" typeface="Times New Roman"/>
+        <a:font script="Uigh" typeface="Microsoft Uighur"/>
+        <a:font script="Geor" typeface="Sylfaen"/>
+        <a:font script="Armn" typeface="Arial"/>
+        <a:font script="Bugi" typeface="Leelawadee UI"/>
+        <a:font script="Bopo" typeface="Microsoft JhengHei"/>
+        <a:font script="Java" typeface="Javanese Text"/>
+        <a:font script="Lisu" typeface="Segoe UI"/>
+        <a:font script="Mymr" typeface="Myanmar Text"/>
+        <a:font script="Nkoo" typeface="Ebrima"/>
+        <a:font script="Olck" typeface="Nirmala UI"/>
+        <a:font script="Osma" typeface="Ebrima"/>
+        <a:font script="Phag" typeface="Phagspa"/>
+        <a:font script="Syrn" typeface="Estrangelo Edessa"/>
+        <a:font script="Syrj" typeface="Estrangelo Edessa"/>
+        <a:font script="Syre" typeface="Estrangelo Edessa"/>
+        <a:font script="Sora" typeface="Nirmala UI"/>
+        <a:font script="Tale" typeface="Microsoft Tai Le"/>
+        <a:font script="Talu" typeface="Microsoft New Tai Lue"/>
+        <a:font script="Tfng" typeface="Ebrima"/>
+      </a:majorFont>
+      <a:minorFont>
+        <a:latin typeface="Calibri" panose="020F0502020204030204"/>
+        <a:ea typeface=""/>
+        <a:cs typeface=""/>
+        <a:font script="Jpan" typeface="游ゴシック"/>
+        <a:font script="Hang" typeface="맑은 고딕"/>
+        <a:font script="Hans" typeface="等线"/>
+        <a:font script="Hant" typeface="新細明體"/>
+        <a:font script="Arab" typeface="Arial"/>
+        <a:font script="Hebr" typeface="Arial"/>
+        <a:font script="Thai" typeface="Cordia New"/>
+        <a:font script="Ethi" typeface="Nyala"/>
+        <a:font script="Beng" typeface="Vrinda"/>
+        <a:font script="Gujr" typeface="Shruti"/>
+        <a:font script="Khmr" typeface="DaunPenh"/>
+        <a:font script="Knda" typeface="Tunga"/>
+        <a:font script="Guru" typeface="Raavi"/>
+        <a:font script="Cans" typeface="Euphemia"/>
+        <a:font script="Cher" typeface="Plantagenet Cherokee"/>
+        <a:font script="Yiii" typeface="Microsoft Yi Baiti"/>
+        <a:font script="Tibt" typeface="Microsoft Himalaya"/>
+        <a:font script="Thaa" typeface="MV Boli"/>
+        <a:font script="Deva" typeface="Mangal"/>
+        <a:font script="Telu" typeface="Gautami"/>
+        <a:font script="Taml" typeface="Latha"/>
+        <a:font script="Syrc" typeface="Estrangelo Edessa"/>
+        <a:font script="Orya" typeface="Kalinga"/>
+        <a:font script="Mlym" typeface="Kartika"/>
+        <a:font script="Laoo" typeface="DokChampa"/>
+        <a:font script="Sinh" typeface="Iskoola Pota"/>
+        <a:font script="Mong" typeface="Mongolian Baiti"/>
+        <a:font script="Viet" typeface="Arial"/>
+        <a:font script="Uigh" typeface="Microsoft Uighur"/>
+        <a:font script="Geor" typeface="Sylfaen"/>
+        <a:font script="Armn" typeface="Arial"/>
+        <a:font script="Bugi" typeface="Leelawadee UI"/>
+        <a:font script="Bopo" typeface="Microsoft JhengHei"/>
+        <a:font script="Java" typeface="Javanese Text"/>
+        <a:font script="Lisu" typeface="Segoe UI"/>
+        <a:font script="Mymr" typeface="Myanmar Text"/>
+        <a:font script="Nkoo" typeface="Ebrima"/>
+        <a:font script="Olck" typeface="Nirmala UI"/>
+        <a:font script="Osma" typeface="Ebrima"/>
+        <a:font script="Phag" typeface="Phagspa"/>
+        <a:font script="Syrn" typeface="Estrangelo Edessa"/>
+        <a:font script="Syrj" typeface="Estrangelo Edessa"/>
+        <a:font script="Syre" typeface="Estrangelo Edessa"/>
+        <a:font script="Sora" typeface="Nirmala UI"/>
+        <a:font script="Tale" typeface="Microsoft Tai Le"/>
+        <a:font script="Talu" typeface="Microsoft New Tai Lue"/>
+        <a:font script="Tfng" typeface="Ebrima"/>
+      </a:minorFont>
+    </a:fontScheme>
+    <a:fmtScheme name="Office">
+      <a:fillStyleLst>
+        <a:solidFill>
+          <a:schemeClr val="phClr"/>
+        </a:solidFill>
+        <a:gradFill rotWithShape="1">
+          <a:gsLst>
+            <a:gs pos="0">
+              <a:schemeClr val="phClr">
+                <a:lumMod val="110000"/>
+                <a:satMod val="105000"/>
+                <a:tint val="67000"/>
+              </a:schemeClr>
+            </a:gs>
+            <a:gs pos="50000">
+              <a:schemeClr val="phClr">
+                <a:lumMod val="105000"/>
+                <a:satMod val="103000"/>
+                <a:tint val="73000"/>
+              </a:schemeClr>
+            </a:gs>
+            <a:gs pos="100000">
+              <a:schemeClr val="phClr">
+                <a:lumMod val="105000"/>
+                <a:satMod val="109000"/>
+                <a:tint val="81000"/>
+              </a:schemeClr>
+            </a:gs>
+          </a:gsLst>
+          <a:lin ang="5400000" scaled="0"/>
+        </a:gradFill>
+        <a:gradFill rotWithShape="1">
+          <a:gsLst>
+            <a:gs pos="0">
+              <a:schemeClr val="phClr">
+                <a:satMod val="103000"/>
+                <a:lumMod val="102000"/>
+                <a:tint val="94000"/>
+              </a:schemeClr>
+            </a:gs>
+            <a:gs pos="50000">
+              <a:schemeClr val="phClr">
+                <a:satMod val="110000"/>
+                <a:lumMod val="100000"/>
+                <a:shade val="100000"/>
+              </a:schemeClr>
+            </a:gs>
+            <a:gs pos="100000">
+              <a:schemeClr val="phClr">
+                <a:lumMod val="99000"/>
+                <a:satMod val="120000"/>
+                <a:shade val="78000"/>
+              </a:schemeClr>
+            </a:gs>
+          </a:gsLst>
+          <a:lin ang="5400000" scaled="0"/>
+        </a:gradFill>
+      </a:fillStyleLst>
+      <a:lnStyleLst>
+        <a:ln w="6350" cap="flat" cmpd="sng" algn="ctr">
+          <a:solidFill>
+            <a:schemeClr val="phClr"/>
+          </a:solidFill>
+          <a:prstDash val="solid"/>
+          <a:miter lim="800000"/>
+        </a:ln>
+        <a:ln w="12700" cap="flat" cmpd="sng" algn="ctr">
+          <a:solidFill>
+            <a:schemeClr val="phClr"/>
+          </a:solidFill>
+          <a:prstDash val="solid"/>
+          <a:miter lim="800000"/>
+        </a:ln>
+        <a:ln w="19050" cap="flat" cmpd="sng" algn="ctr">
+          <a:solidFill>
+            <a:schemeClr val="phClr"/>
+          </a:solidFill>
+          <a:prstDash val="solid"/>
+          <a:miter lim="800000"/>
+        </a:ln>
+      </a:lnStyleLst>
+      <a:effectStyleLst>
+        <a:effectStyle>
+          <a:effectLst/>
+        </a:effectStyle>
+        <a:effectStyle>
+          <a:effectLst/>
+        </a:effectStyle>
+        <a:effectStyle>
+          <a:effectLst>
+            <a:outerShdw blurRad="57150" dist="19050" dir="5400000" algn="ctr" rotWithShape="0">
+              <a:srgbClr val="000000">
+                <a:alpha val="63000"/>
+              </a:srgbClr>
+            </a:outerShdw>
+          </a:effectLst>
+        </a:effectStyle>
+      </a:effectStyleLst>
+      <a:bgFillStyleLst>
+        <a:solidFill>
+          <a:schemeClr val="phClr"/>
+        </a:solidFill>
+        <a:solidFill>
+          <a:schemeClr val="phClr">
+            <a:tint val="95000"/>
+            <a:satMod val="170000"/>
+          </a:schemeClr>
+        </a:solidFill>
+        <a:gradFill rotWithShape="1">
+          <a:gsLst>
+            <a:gs pos="0">
+              <a:schemeClr val="phClr">
+                <a:tint val="93000"/>
+                <a:satMod val="150000"/>
+                <a:shade val="98000"/>
+                <a:lumMod val="102000"/>
+              </a:schemeClr>
+            </a:gs>
+            <a:gs pos="50000">
+              <a:schemeClr val="phClr">
+                <a:tint val="98000"/>
+                <a:satMod val="130000"/>
+                <a:shade val="90000"/>
+                <a:lumMod val="103000"/>
+              </a:schemeClr>
+            </a:gs>
+            <a:gs pos="100000">
+              <a:schemeClr val="phClr">
+                <a:shade val="63000"/>
+                <a:satMod val="120000"/>
+              </a:schemeClr>
+            </a:gs>
+          </a:gsLst>
+          <a:lin ang="5400000" scaled="0"/>
+        </a:gradFill>
+      </a:bgFillStyleLst>
+    </a:fmtScheme>
+  </a:themeElements>
+  <a:objectDefaults/>
+  <a:extraClrSchemeLst/>
+  <a:extLst>
+    <a:ext uri="{05A4C25C-085E-4340-85A3-A5531E510DB2}">
+      <thm15:themeFamily xmlns:thm15="http://schemas.microsoft.com/office/thememl/2012/main" name="Office Theme" id="{62F939B6-93AF-4DB8-9C6B-D6C7DFDC589F}" vid="{4A3C46E8-61CC-4603-A589-7422A47A8E4A}"/>
+    </a:ext>
+  </a:extLst>
+</a:theme>
 </file>